--- a/reports/cloud_cost_anomaly_detection_presentation.pptx
+++ b/reports/cloud_cost_anomaly_detection_presentation.pptx
@@ -4,6 +4,9 @@
   <p:sldMasterIdLst>
     <p:sldMasterId id="2147483648" r:id="rId1"/>
   </p:sldMasterIdLst>
+  <p:notesMasterIdLst>
+    <p:notesMasterId r:id="rId14"/>
+  </p:notesMasterIdLst>
   <p:sldIdLst>
     <p:sldId id="256" r:id="rId2"/>
     <p:sldId id="257" r:id="rId3"/>
@@ -18,9 +21,6 @@
     <p:sldId id="266" r:id="rId12"/>
     <p:sldId id="267" r:id="rId13"/>
   </p:sldIdLst>
-  <p:notesMasterIdLst>
-    <p:notesMasterId r:id="rId14"/>
-  </p:notesMasterIdLst>
   <p:sldSz cx="12192000" cy="6858000"/>
   <p:notesSz cx="6858000" cy="12192000"/>
   <p:defaultTextStyle>
@@ -115,6 +115,11 @@
       </a:defRPr>
     </a:lvl9pPr>
   </p:defaultTextStyle>
+  <p:extLst>
+    <p:ext uri="{EFAFB233-063F-42B5-8137-9DF3F51BA10A}">
+      <p15:sldGuideLst xmlns:p15="http://schemas.microsoft.com/office/powerpoint/2012/main"/>
+    </p:ext>
+  </p:extLst>
 </p:presentation>
 </file>
 
@@ -140,234 +145,10 @@
           <a:chExt cx="0" cy="0"/>
         </a:xfrm>
       </p:grpSpPr>
-      <p:sp>
-        <p:nvSpPr>
-          <p:cNvPr id="2" name="Header Placeholder 1"/>
-          <p:cNvSpPr>
-            <a:spLocks noGrp="1"/>
-          </p:cNvSpPr>
-          <p:nvPr>
-            <p:ph type="hdr" sz="quarter"/>
-          </p:nvPr>
-        </p:nvSpPr>
-        <p:spPr>
-          <a:xfrm>
-            <a:off x="0" y="0"/>
-            <a:ext cx="2971800" cy="458788"/>
-          </a:xfrm>
-          <a:prstGeom prst="rect">
-            <a:avLst/>
-          </a:prstGeom>
-        </p:spPr>
-        <p:txBody>
-          <a:bodyPr vert="horz" lIns="91440" tIns="45720" rIns="91440" bIns="45720" rtlCol="0"/>
-          <a:lstStyle>
-            <a:lvl1pPr algn="l">
-              <a:defRPr sz="1200"/>
-            </a:lvl1pPr>
-          </a:lstStyle>
-          <a:p>
-            <a:endParaRPr lang="en-US"/>
-          </a:p>
-        </p:txBody>
-      </p:sp>
-      <p:sp>
-        <p:nvSpPr>
-          <p:cNvPr id="3" name="Date Placeholder 2"/>
-          <p:cNvSpPr>
-            <a:spLocks noGrp="1"/>
-          </p:cNvSpPr>
-          <p:nvPr>
-            <p:ph type="dt" idx="1"/>
-          </p:nvPr>
-        </p:nvSpPr>
-        <p:spPr>
-          <a:xfrm>
-            <a:off x="3884613" y="0"/>
-            <a:ext cx="2971800" cy="458788"/>
-          </a:xfrm>
-          <a:prstGeom prst="rect">
-            <a:avLst/>
-          </a:prstGeom>
-        </p:spPr>
-        <p:txBody>
-          <a:bodyPr vert="horz" lIns="91440" tIns="45720" rIns="91440" bIns="45720" rtlCol="0"/>
-          <a:lstStyle>
-            <a:lvl1pPr algn="r">
-              <a:defRPr sz="1200"/>
-            </a:lvl1pPr>
-          </a:lstStyle>
-          <a:p>
-            <a:fld id="{5282F153-3F37-0F45-9E97-73ACFA13230C}" type="datetimeFigureOut">
-              <a:rPr lang="en-US"/>
-              <a:t>7/23/19</a:t>
-            </a:fld>
-            <a:endParaRPr lang="en-US"/>
-          </a:p>
-        </p:txBody>
-      </p:sp>
-      <p:sp>
-        <p:nvSpPr>
-          <p:cNvPr id="4" name="Slide Image Placeholder 3"/>
-          <p:cNvSpPr>
-            <a:spLocks noGrp="1" noRot="1" noChangeAspect="1"/>
-          </p:cNvSpPr>
-          <p:nvPr>
-            <p:ph type="sldImg" idx="2"/>
-          </p:nvPr>
-        </p:nvSpPr>
-        <p:spPr>
-          <a:xfrm>
-            <a:off x="685800" y="1143000"/>
-            <a:ext cx="5486400" cy="3086100"/>
-          </a:xfrm>
-          <a:prstGeom prst="rect">
-            <a:avLst/>
-          </a:prstGeom>
-          <a:noFill/>
-          <a:ln w="12700">
-            <a:solidFill>
-              <a:prstClr val="black"/>
-            </a:solidFill>
-          </a:ln>
-        </p:spPr>
-        <p:txBody>
-          <a:bodyPr vert="horz" lIns="91440" tIns="45720" rIns="91440" bIns="45720" rtlCol="0" anchor="ctr"/>
-          <a:lstStyle/>
-          <a:p>
-            <a:endParaRPr lang="en-US"/>
-          </a:p>
-        </p:txBody>
-      </p:sp>
-      <p:sp>
-        <p:nvSpPr>
-          <p:cNvPr id="5" name="Notes Placeholder 4"/>
-          <p:cNvSpPr>
-            <a:spLocks noGrp="1"/>
-          </p:cNvSpPr>
-          <p:nvPr>
-            <p:ph type="body" sz="quarter" idx="3"/>
-          </p:nvPr>
-        </p:nvSpPr>
-        <p:spPr>
-          <a:xfrm>
-            <a:off x="685800" y="4400550"/>
-            <a:ext cx="5486400" cy="3600450"/>
-          </a:xfrm>
-          <a:prstGeom prst="rect">
-            <a:avLst/>
-          </a:prstGeom>
-        </p:spPr>
-        <p:txBody>
-          <a:bodyPr vert="horz" lIns="91440" tIns="45720" rIns="91440" bIns="45720" rtlCol="0"/>
-          <a:lstStyle/>
-          <a:p>
-            <a:pPr lvl="0"/>
-            <a:r>
-              <a:rPr lang="en-US"/>
-              <a:t>Click to edit Master text styles</a:t>
-            </a:r>
-          </a:p>
-          <a:p>
-            <a:pPr lvl="1"/>
-            <a:r>
-              <a:rPr lang="en-US"/>
-              <a:t>Second level</a:t>
-            </a:r>
-          </a:p>
-          <a:p>
-            <a:pPr lvl="2"/>
-            <a:r>
-              <a:rPr lang="en-US"/>
-              <a:t>Third level</a:t>
-            </a:r>
-          </a:p>
-          <a:p>
-            <a:pPr lvl="3"/>
-            <a:r>
-              <a:rPr lang="en-US"/>
-              <a:t>Fourth level</a:t>
-            </a:r>
-          </a:p>
-          <a:p>
-            <a:pPr lvl="4"/>
-            <a:r>
-              <a:rPr lang="en-US"/>
-              <a:t>Fifth level</a:t>
-            </a:r>
-          </a:p>
-        </p:txBody>
-      </p:sp>
-      <p:sp>
-        <p:nvSpPr>
-          <p:cNvPr id="6" name="Footer Placeholder 5"/>
-          <p:cNvSpPr>
-            <a:spLocks noGrp="1"/>
-          </p:cNvSpPr>
-          <p:nvPr>
-            <p:ph type="ftr" sz="quarter" idx="4"/>
-          </p:nvPr>
-        </p:nvSpPr>
-        <p:spPr>
-          <a:xfrm>
-            <a:off x="0" y="8685213"/>
-            <a:ext cx="2971800" cy="458787"/>
-          </a:xfrm>
-          <a:prstGeom prst="rect">
-            <a:avLst/>
-          </a:prstGeom>
-        </p:spPr>
-        <p:txBody>
-          <a:bodyPr vert="horz" lIns="91440" tIns="45720" rIns="91440" bIns="45720" rtlCol="0" anchor="b"/>
-          <a:lstStyle>
-            <a:lvl1pPr algn="l">
-              <a:defRPr sz="1200"/>
-            </a:lvl1pPr>
-          </a:lstStyle>
-          <a:p>
-            <a:endParaRPr lang="en-US"/>
-          </a:p>
-        </p:txBody>
-      </p:sp>
-      <p:sp>
-        <p:nvSpPr>
-          <p:cNvPr id="7" name="Slide Number Placeholder 6"/>
-          <p:cNvSpPr>
-            <a:spLocks noGrp="1"/>
-          </p:cNvSpPr>
-          <p:nvPr>
-            <p:ph type="sldNum" sz="quarter" idx="5"/>
-          </p:nvPr>
-        </p:nvSpPr>
-        <p:spPr>
-          <a:xfrm>
-            <a:off x="3884613" y="8685213"/>
-            <a:ext cx="2971800" cy="458787"/>
-          </a:xfrm>
-          <a:prstGeom prst="rect">
-            <a:avLst/>
-          </a:prstGeom>
-        </p:spPr>
-        <p:txBody>
-          <a:bodyPr vert="horz" lIns="91440" tIns="45720" rIns="91440" bIns="45720" rtlCol="0" anchor="b"/>
-          <a:lstStyle>
-            <a:lvl1pPr algn="r">
-              <a:defRPr sz="1200"/>
-            </a:lvl1pPr>
-          </a:lstStyle>
-          <a:p>
-            <a:fld id="{CE5E9CC1-C706-0F49-92D6-E571CC5EEA8F}" type="slidenum">
-              <a:rPr lang="en-US"/>
-              <a:t>‹#›</a:t>
-            </a:fld>
-            <a:endParaRPr lang="en-US"/>
-          </a:p>
-        </p:txBody>
-      </p:sp>
     </p:spTree>
     <p:extLst>
       <p:ext uri="{BB962C8B-B14F-4D97-AF65-F5344CB8AC3E}">
-        <p14:creationId xmlns:p14="http://schemas.microsoft.com/office/powerpoint/2010/main" val="1024086991"/>
+        <p14:creationId xmlns:p14="http://schemas.microsoft.com/office/powerpoint/2010/main" val="2473895712"/>
       </p:ext>
     </p:extLst>
   </p:cSld>
@@ -511,10 +292,6 @@
           <a:bodyPr/>
           <a:lstStyle/>
           <a:p>
-            <a:r>
-              <a:rPr lang="en-US" dirty="0"/>
-              <a:t/>
-            </a:r>
             <a:endParaRPr lang="en-US" dirty="0"/>
           </a:p>
         </p:txBody>
@@ -599,10 +376,6 @@
           <a:bodyPr/>
           <a:lstStyle/>
           <a:p>
-            <a:r>
-              <a:rPr lang="en-US" dirty="0"/>
-              <a:t/>
-            </a:r>
             <a:endParaRPr lang="en-US" dirty="0"/>
           </a:p>
         </p:txBody>
@@ -687,10 +460,6 @@
           <a:bodyPr/>
           <a:lstStyle/>
           <a:p>
-            <a:r>
-              <a:rPr lang="en-US" dirty="0"/>
-              <a:t/>
-            </a:r>
             <a:endParaRPr lang="en-US" dirty="0"/>
           </a:p>
         </p:txBody>
@@ -775,10 +544,6 @@
           <a:bodyPr/>
           <a:lstStyle/>
           <a:p>
-            <a:r>
-              <a:rPr lang="en-US" dirty="0"/>
-              <a:t/>
-            </a:r>
             <a:endParaRPr lang="en-US" dirty="0"/>
           </a:p>
         </p:txBody>
@@ -863,10 +628,6 @@
           <a:bodyPr/>
           <a:lstStyle/>
           <a:p>
-            <a:r>
-              <a:rPr lang="en-US" dirty="0"/>
-              <a:t/>
-            </a:r>
             <a:endParaRPr lang="en-US" dirty="0"/>
           </a:p>
         </p:txBody>
@@ -951,10 +712,6 @@
           <a:bodyPr/>
           <a:lstStyle/>
           <a:p>
-            <a:r>
-              <a:rPr lang="en-US" dirty="0"/>
-              <a:t/>
-            </a:r>
             <a:endParaRPr lang="en-US" dirty="0"/>
           </a:p>
         </p:txBody>
@@ -1039,10 +796,6 @@
           <a:bodyPr/>
           <a:lstStyle/>
           <a:p>
-            <a:r>
-              <a:rPr lang="en-US" dirty="0"/>
-              <a:t/>
-            </a:r>
             <a:endParaRPr lang="en-US" dirty="0"/>
           </a:p>
         </p:txBody>
@@ -1127,10 +880,6 @@
           <a:bodyPr/>
           <a:lstStyle/>
           <a:p>
-            <a:r>
-              <a:rPr lang="en-US" dirty="0"/>
-              <a:t/>
-            </a:r>
             <a:endParaRPr lang="en-US" dirty="0"/>
           </a:p>
         </p:txBody>
@@ -1215,10 +964,6 @@
           <a:bodyPr/>
           <a:lstStyle/>
           <a:p>
-            <a:r>
-              <a:rPr lang="en-US" dirty="0"/>
-              <a:t/>
-            </a:r>
             <a:endParaRPr lang="en-US" dirty="0"/>
           </a:p>
         </p:txBody>
@@ -1303,10 +1048,6 @@
           <a:bodyPr/>
           <a:lstStyle/>
           <a:p>
-            <a:r>
-              <a:rPr lang="en-US" dirty="0"/>
-              <a:t/>
-            </a:r>
             <a:endParaRPr lang="en-US" dirty="0"/>
           </a:p>
         </p:txBody>
@@ -1391,10 +1132,6 @@
           <a:bodyPr/>
           <a:lstStyle/>
           <a:p>
-            <a:r>
-              <a:rPr lang="en-US" dirty="0"/>
-              <a:t/>
-            </a:r>
             <a:endParaRPr lang="en-US" dirty="0"/>
           </a:p>
         </p:txBody>
@@ -1479,10 +1216,6 @@
           <a:bodyPr/>
           <a:lstStyle/>
           <a:p>
-            <a:r>
-              <a:rPr lang="en-US" dirty="0"/>
-              <a:t/>
-            </a:r>
             <a:endParaRPr lang="en-US" dirty="0"/>
           </a:p>
         </p:txBody>
@@ -1556,6 +1289,11 @@
 <file path=ppt/slideMasters/slideMaster1.xml><?xml version="1.0" encoding="utf-8"?>
 <p:sldMaster xmlns:a="http://schemas.openxmlformats.org/drawingml/2006/main" xmlns:r="http://schemas.openxmlformats.org/officeDocument/2006/relationships" xmlns:p="http://schemas.openxmlformats.org/presentationml/2006/main">
   <p:cSld>
+    <p:bg>
+      <p:bgRef idx="1001">
+        <a:schemeClr val="bg1"/>
+      </p:bgRef>
+    </p:bg>
     <p:spTree>
       <p:nvGrpSpPr>
         <p:cNvPr id="1" name=""/>
@@ -1838,6 +1576,7 @@
         <a:solidFill>
           <a:srgbClr val="0B1324"/>
         </a:solidFill>
+        <a:effectLst/>
       </p:bgPr>
     </p:bg>
     <p:spTree>
@@ -1877,7 +1616,7 @@
           </a:bodyPr>
           <a:lstStyle/>
           <a:p>
-            <a:pPr indent="0" marL="0">
+            <a:pPr marL="0" indent="0">
               <a:buNone/>
             </a:pPr>
             <a:r>
@@ -1894,7 +1633,7 @@
             <a:endParaRPr lang="en-US" sz="4100" dirty="0"/>
           </a:p>
           <a:p>
-            <a:pPr indent="0" marL="0">
+            <a:pPr marL="0" indent="0">
               <a:buNone/>
             </a:pPr>
             <a:r>
@@ -1933,7 +1672,7 @@
           <a:bodyPr wrap="square" lIns="0" tIns="0" rIns="0" bIns="0" rtlCol="0" anchor="ctr"/>
           <a:lstStyle/>
           <a:p>
-            <a:pPr indent="0" marL="0">
+            <a:pPr marL="0" indent="0">
               <a:buNone/>
             </a:pPr>
             <a:r>
@@ -1971,7 +1710,7 @@
           </a:bodyPr>
           <a:lstStyle/>
           <a:p>
-            <a:pPr indent="0" marL="0">
+            <a:pPr marL="0" indent="0">
               <a:buNone/>
             </a:pPr>
             <a:r>
@@ -2007,7 +1746,7 @@
           <a:bodyPr wrap="square" lIns="0" tIns="0" rIns="0" bIns="0" rtlCol="0" anchor="ctr"/>
           <a:lstStyle/>
           <a:p>
-            <a:pPr algn="ctr" indent="0" marL="0">
+            <a:pPr marL="0" indent="0" algn="ctr">
               <a:buNone/>
             </a:pPr>
             <a:r>
@@ -2043,7 +1782,7 @@
           <a:bodyPr wrap="square" lIns="0" tIns="0" rIns="0" bIns="0" rtlCol="0" anchor="ctr"/>
           <a:lstStyle/>
           <a:p>
-            <a:pPr algn="ctr" indent="0" marL="0">
+            <a:pPr marL="0" indent="0" algn="ctr">
               <a:buNone/>
             </a:pPr>
             <a:r>
@@ -2079,7 +1818,7 @@
           <a:bodyPr wrap="square" lIns="0" tIns="0" rIns="0" bIns="0" rtlCol="0" anchor="ctr"/>
           <a:lstStyle/>
           <a:p>
-            <a:pPr algn="ctr" indent="0" marL="0">
+            <a:pPr marL="0" indent="0" algn="ctr">
               <a:buNone/>
             </a:pPr>
             <a:r>
@@ -2115,7 +1854,7 @@
           <a:bodyPr wrap="square" lIns="0" tIns="0" rIns="0" bIns="0" rtlCol="0" anchor="ctr"/>
           <a:lstStyle/>
           <a:p>
-            <a:pPr algn="ctr" indent="0" marL="0">
+            <a:pPr marL="0" indent="0" algn="ctr">
               <a:buNone/>
             </a:pPr>
             <a:r>
@@ -2151,7 +1890,7 @@
           <a:bodyPr wrap="square" lIns="0" tIns="0" rIns="0" bIns="0" rtlCol="0" anchor="ctr"/>
           <a:lstStyle/>
           <a:p>
-            <a:pPr algn="ctr" indent="0" marL="0">
+            <a:pPr marL="0" indent="0" algn="ctr">
               <a:buNone/>
             </a:pPr>
             <a:r>
@@ -2187,7 +1926,7 @@
           <a:bodyPr wrap="square" lIns="0" tIns="0" rIns="0" bIns="0" rtlCol="0" anchor="ctr"/>
           <a:lstStyle/>
           <a:p>
-            <a:pPr algn="ctr" indent="0" marL="0">
+            <a:pPr marL="0" indent="0" algn="ctr">
               <a:buNone/>
             </a:pPr>
             <a:r>
@@ -2223,7 +1962,7 @@
           <a:bodyPr wrap="square" lIns="0" tIns="0" rIns="0" bIns="0" rtlCol="0" anchor="ctr"/>
           <a:lstStyle/>
           <a:p>
-            <a:pPr algn="ctr" indent="0" marL="0">
+            <a:pPr marL="0" indent="0" algn="ctr">
               <a:buNone/>
             </a:pPr>
             <a:r>
@@ -2259,7 +1998,7 @@
           <a:bodyPr wrap="square" lIns="0" tIns="0" rIns="0" bIns="0" rtlCol="0" anchor="ctr"/>
           <a:lstStyle/>
           <a:p>
-            <a:pPr algn="ctr" indent="0" marL="0">
+            <a:pPr marL="0" indent="0" algn="ctr">
               <a:buNone/>
             </a:pPr>
             <a:r>
@@ -2276,14 +2015,14 @@
       </p:sp>
       <p:pic>
         <p:nvPicPr>
-          <p:cNvPr id="13" name="Image 0" descr="/mnt/data/rolling_avg_vs_actual.png">    </p:cNvPr>
+          <p:cNvPr id="13" name="Image 0" descr="/mnt/data/rolling_avg_vs_actual.png"/>
           <p:cNvPicPr>
             <a:picLocks noChangeAspect="1"/>
           </p:cNvPicPr>
           <p:nvPr/>
         </p:nvPicPr>
         <p:blipFill>
-          <a:blip r:embed="rId1"/>
+          <a:blip r:embed="rId3"/>
           <a:stretch>
             <a:fillRect/>
           </a:stretch>
@@ -2319,7 +2058,7 @@
           <a:bodyPr wrap="square" lIns="0" tIns="0" rIns="0" bIns="0" rtlCol="0" anchor="ctr"/>
           <a:lstStyle/>
           <a:p>
-            <a:pPr algn="ctr" indent="0" marL="0">
+            <a:pPr marL="0" indent="0" algn="ctr">
               <a:buNone/>
             </a:pPr>
             <a:r>
@@ -2357,7 +2096,7 @@
           </a:bodyPr>
           <a:lstStyle/>
           <a:p>
-            <a:pPr indent="0" marL="0">
+            <a:pPr marL="0" indent="0">
               <a:buNone/>
             </a:pPr>
             <a:r>
@@ -2371,7 +2110,7 @@
             <a:endParaRPr lang="en-US" sz="1020" dirty="0"/>
           </a:p>
           <a:p>
-            <a:pPr indent="0" marL="0">
+            <a:pPr marL="0" indent="0">
               <a:buNone/>
             </a:pPr>
             <a:r>
@@ -2385,7 +2124,7 @@
             <a:endParaRPr lang="en-US" sz="1020" dirty="0"/>
           </a:p>
           <a:p>
-            <a:pPr indent="0" marL="0">
+            <a:pPr marL="0" indent="0">
               <a:buNone/>
             </a:pPr>
             <a:r>
@@ -2421,7 +2160,7 @@
           <a:bodyPr wrap="square" lIns="0" tIns="0" rIns="0" bIns="0" rtlCol="0" anchor="ctr"/>
           <a:lstStyle/>
           <a:p>
-            <a:pPr indent="0" marL="0">
+            <a:pPr marL="0" indent="0">
               <a:buNone/>
             </a:pPr>
             <a:r>
@@ -2457,7 +2196,7 @@
           <a:bodyPr wrap="square" lIns="0" tIns="0" rIns="0" bIns="0" rtlCol="0" anchor="ctr"/>
           <a:lstStyle/>
           <a:p>
-            <a:pPr indent="0" marL="0">
+            <a:pPr marL="0" indent="0">
               <a:buNone/>
             </a:pPr>
             <a:r>
@@ -2493,7 +2232,7 @@
           <a:bodyPr wrap="square" lIns="0" tIns="0" rIns="0" bIns="0" rtlCol="0" anchor="ctr"/>
           <a:lstStyle/>
           <a:p>
-            <a:pPr algn="r" indent="0" marL="0">
+            <a:pPr marL="0" indent="0" algn="r">
               <a:buNone/>
             </a:pPr>
             <a:r>
@@ -2524,6 +2263,7 @@
         <a:solidFill>
           <a:srgbClr val="0B1324"/>
         </a:solidFill>
+        <a:effectLst/>
       </p:bgPr>
     </p:bg>
     <p:spTree>
@@ -2563,7 +2303,7 @@
           </a:bodyPr>
           <a:lstStyle/>
           <a:p>
-            <a:pPr indent="0" marL="0">
+            <a:pPr marL="0" indent="0">
               <a:buNone/>
             </a:pPr>
             <a:r>
@@ -2604,7 +2344,7 @@
           </a:bodyPr>
           <a:lstStyle/>
           <a:p>
-            <a:pPr indent="0" marL="0">
+            <a:pPr marL="0" indent="0">
               <a:buNone/>
             </a:pPr>
             <a:r>
@@ -2663,7 +2403,7 @@
           <a:bodyPr wrap="square" lIns="0" tIns="0" rIns="0" bIns="0" rtlCol="0" anchor="ctr"/>
           <a:lstStyle/>
           <a:p>
-            <a:pPr indent="0" marL="0">
+            <a:pPr marL="0" indent="0">
               <a:buNone/>
             </a:pPr>
             <a:r>
@@ -2701,7 +2441,7 @@
           </a:bodyPr>
           <a:lstStyle/>
           <a:p>
-            <a:pPr indent="0" marL="0">
+            <a:pPr marL="0" indent="0">
               <a:buNone/>
             </a:pPr>
             <a:r>
@@ -2718,7 +2458,7 @@
             <a:endParaRPr lang="en-US" sz="1130" dirty="0"/>
           </a:p>
           <a:p>
-            <a:pPr indent="0" marL="0">
+            <a:pPr marL="0" indent="0">
               <a:buNone/>
             </a:pPr>
             <a:r>
@@ -2735,7 +2475,7 @@
             <a:endParaRPr lang="en-US" sz="1130" dirty="0"/>
           </a:p>
           <a:p>
-            <a:pPr indent="0" marL="0">
+            <a:pPr marL="0" indent="0">
               <a:buNone/>
             </a:pPr>
             <a:r>
@@ -2752,7 +2492,7 @@
             <a:endParaRPr lang="en-US" sz="1130" dirty="0"/>
           </a:p>
           <a:p>
-            <a:pPr indent="0" marL="0">
+            <a:pPr marL="0" indent="0">
               <a:buNone/>
             </a:pPr>
             <a:r>
@@ -2769,7 +2509,7 @@
             <a:endParaRPr lang="en-US" sz="1130" dirty="0"/>
           </a:p>
           <a:p>
-            <a:pPr indent="0" marL="0">
+            <a:pPr marL="0" indent="0">
               <a:buNone/>
             </a:pPr>
             <a:r>
@@ -2786,13 +2526,13 @@
             <a:endParaRPr lang="en-US" sz="1130" dirty="0"/>
           </a:p>
           <a:p>
-            <a:pPr indent="0" marL="0">
+            <a:pPr marL="0" indent="0">
               <a:buNone/>
             </a:pPr>
             <a:endParaRPr lang="en-US" sz="1130" dirty="0"/>
           </a:p>
           <a:p>
-            <a:pPr indent="0" marL="0">
+            <a:pPr marL="0" indent="0">
               <a:buNone/>
             </a:pPr>
             <a:r>
@@ -2809,7 +2549,7 @@
             <a:endParaRPr lang="en-US" sz="1130" dirty="0"/>
           </a:p>
           <a:p>
-            <a:pPr indent="0" marL="0">
+            <a:pPr marL="0" indent="0">
               <a:buNone/>
             </a:pPr>
             <a:r>
@@ -2826,7 +2566,7 @@
             <a:endParaRPr lang="en-US" sz="1130" dirty="0"/>
           </a:p>
           <a:p>
-            <a:pPr indent="0" marL="0">
+            <a:pPr marL="0" indent="0">
               <a:buNone/>
             </a:pPr>
             <a:r>
@@ -2865,7 +2605,7 @@
           <a:bodyPr wrap="square" lIns="0" tIns="0" rIns="0" bIns="0" rtlCol="0" anchor="ctr"/>
           <a:lstStyle/>
           <a:p>
-            <a:pPr indent="0" marL="0">
+            <a:pPr marL="0" indent="0">
               <a:buNone/>
             </a:pPr>
             <a:r>
@@ -2903,7 +2643,7 @@
           </a:bodyPr>
           <a:lstStyle/>
           <a:p>
-            <a:pPr indent="0" marL="0">
+            <a:pPr marL="0" indent="0">
               <a:buNone/>
             </a:pPr>
             <a:r>
@@ -2920,7 +2660,7 @@
             <a:endParaRPr lang="en-US" sz="1060" dirty="0"/>
           </a:p>
           <a:p>
-            <a:pPr indent="0" marL="0">
+            <a:pPr marL="0" indent="0">
               <a:buNone/>
             </a:pPr>
             <a:r>
@@ -2937,7 +2677,7 @@
             <a:endParaRPr lang="en-US" sz="1060" dirty="0"/>
           </a:p>
           <a:p>
-            <a:pPr indent="0" marL="0">
+            <a:pPr marL="0" indent="0">
               <a:buNone/>
             </a:pPr>
             <a:r>
@@ -2954,7 +2694,7 @@
             <a:endParaRPr lang="en-US" sz="1060" dirty="0"/>
           </a:p>
           <a:p>
-            <a:pPr indent="0" marL="0">
+            <a:pPr marL="0" indent="0">
               <a:buNone/>
             </a:pPr>
             <a:r>
@@ -2971,7 +2711,7 @@
             <a:endParaRPr lang="en-US" sz="1060" dirty="0"/>
           </a:p>
           <a:p>
-            <a:pPr indent="0" marL="0">
+            <a:pPr marL="0" indent="0">
               <a:buNone/>
             </a:pPr>
             <a:r>
@@ -2988,13 +2728,13 @@
             <a:endParaRPr lang="en-US" sz="1060" dirty="0"/>
           </a:p>
           <a:p>
-            <a:pPr indent="0" marL="0">
+            <a:pPr marL="0" indent="0">
               <a:buNone/>
             </a:pPr>
             <a:endParaRPr lang="en-US" sz="1060" dirty="0"/>
           </a:p>
           <a:p>
-            <a:pPr indent="0" marL="0">
+            <a:pPr marL="0" indent="0">
               <a:buNone/>
             </a:pPr>
             <a:r>
@@ -3011,7 +2751,7 @@
             <a:endParaRPr lang="en-US" sz="1060" dirty="0"/>
           </a:p>
           <a:p>
-            <a:pPr indent="0" marL="0">
+            <a:pPr marL="0" indent="0">
               <a:buNone/>
             </a:pPr>
             <a:r>
@@ -3028,7 +2768,7 @@
             <a:endParaRPr lang="en-US" sz="1060" dirty="0"/>
           </a:p>
           <a:p>
-            <a:pPr indent="0" marL="0">
+            <a:pPr marL="0" indent="0">
               <a:buNone/>
             </a:pPr>
             <a:r>
@@ -3067,7 +2807,7 @@
           <a:bodyPr wrap="square" lIns="0" tIns="0" rIns="0" bIns="0" rtlCol="0" anchor="ctr"/>
           <a:lstStyle/>
           <a:p>
-            <a:pPr algn="ctr" indent="0" marL="0">
+            <a:pPr marL="0" indent="0" algn="ctr">
               <a:buNone/>
             </a:pPr>
             <a:r>
@@ -3103,7 +2843,7 @@
           <a:bodyPr wrap="square" lIns="0" tIns="0" rIns="0" bIns="0" rtlCol="0" anchor="ctr"/>
           <a:lstStyle/>
           <a:p>
-            <a:pPr indent="0" marL="0">
+            <a:pPr marL="0" indent="0">
               <a:buNone/>
             </a:pPr>
             <a:r>
@@ -3139,7 +2879,7 @@
           <a:bodyPr wrap="square" lIns="0" tIns="0" rIns="0" bIns="0" rtlCol="0" anchor="ctr"/>
           <a:lstStyle/>
           <a:p>
-            <a:pPr algn="r" indent="0" marL="0">
+            <a:pPr marL="0" indent="0" algn="r">
               <a:buNone/>
             </a:pPr>
             <a:r>
@@ -3170,6 +2910,7 @@
         <a:solidFill>
           <a:srgbClr val="0B1324"/>
         </a:solidFill>
+        <a:effectLst/>
       </p:bgPr>
     </p:bg>
     <p:spTree>
@@ -3209,7 +2950,7 @@
           </a:bodyPr>
           <a:lstStyle/>
           <a:p>
-            <a:pPr indent="0" marL="0">
+            <a:pPr marL="0" indent="0">
               <a:buNone/>
             </a:pPr>
             <a:r>
@@ -3250,7 +2991,7 @@
           </a:bodyPr>
           <a:lstStyle/>
           <a:p>
-            <a:pPr indent="0" marL="0">
+            <a:pPr marL="0" indent="0">
               <a:buNone/>
             </a:pPr>
             <a:r>
@@ -3455,7 +3196,7 @@
           </a:bodyPr>
           <a:lstStyle/>
           <a:p>
-            <a:pPr algn="ctr" indent="0" marL="0">
+            <a:pPr marL="0" indent="0" algn="ctr">
               <a:buNone/>
             </a:pPr>
             <a:r>
@@ -3493,7 +3234,7 @@
           </a:bodyPr>
           <a:lstStyle/>
           <a:p>
-            <a:pPr algn="ctr" indent="0" marL="0">
+            <a:pPr marL="0" indent="0" algn="ctr">
               <a:buNone/>
             </a:pPr>
             <a:r>
@@ -3531,7 +3272,7 @@
           </a:bodyPr>
           <a:lstStyle/>
           <a:p>
-            <a:pPr algn="ctr" indent="0" marL="0">
+            <a:pPr marL="0" indent="0" algn="ctr">
               <a:buNone/>
             </a:pPr>
             <a:r>
@@ -3569,7 +3310,7 @@
           </a:bodyPr>
           <a:lstStyle/>
           <a:p>
-            <a:pPr algn="ctr" indent="0" marL="0">
+            <a:pPr marL="0" indent="0" algn="ctr">
               <a:buNone/>
             </a:pPr>
             <a:r>
@@ -3607,7 +3348,7 @@
           </a:bodyPr>
           <a:lstStyle/>
           <a:p>
-            <a:pPr algn="ctr" indent="0" marL="0">
+            <a:pPr marL="0" indent="0" algn="ctr">
               <a:buNone/>
             </a:pPr>
             <a:r>
@@ -3645,7 +3386,7 @@
           </a:bodyPr>
           <a:lstStyle/>
           <a:p>
-            <a:pPr algn="ctr" indent="0" marL="0">
+            <a:pPr marL="0" indent="0" algn="ctr">
               <a:buNone/>
             </a:pPr>
             <a:r>
@@ -3683,7 +3424,7 @@
           </a:bodyPr>
           <a:lstStyle/>
           <a:p>
-            <a:pPr algn="ctr" indent="0" marL="0">
+            <a:pPr marL="0" indent="0" algn="ctr">
               <a:buNone/>
             </a:pPr>
             <a:r>
@@ -3719,7 +3460,7 @@
           <a:bodyPr wrap="square" lIns="0" tIns="0" rIns="0" bIns="0" rtlCol="0" anchor="ctr"/>
           <a:lstStyle/>
           <a:p>
-            <a:pPr algn="ctr" indent="0" marL="0">
+            <a:pPr marL="0" indent="0" algn="ctr">
               <a:buNone/>
             </a:pPr>
             <a:r>
@@ -3757,7 +3498,7 @@
           </a:bodyPr>
           <a:lstStyle/>
           <a:p>
-            <a:pPr indent="0" marL="0">
+            <a:pPr marL="0" indent="0">
               <a:buNone/>
             </a:pPr>
             <a:r>
@@ -3768,9 +3509,6 @@
               </a:rPr>
               <a:t>● </a:t>
             </a:r>
-            <a:pPr indent="0" marL="0">
-              <a:buNone/>
-            </a:pPr>
             <a:r>
               <a:rPr lang="en-US" sz="1200" dirty="0">
                 <a:solidFill>
@@ -3806,7 +3544,7 @@
           </a:bodyPr>
           <a:lstStyle/>
           <a:p>
-            <a:pPr indent="0" marL="0">
+            <a:pPr marL="0" indent="0">
               <a:buNone/>
             </a:pPr>
             <a:r>
@@ -3817,9 +3555,6 @@
               </a:rPr>
               <a:t>● </a:t>
             </a:r>
-            <a:pPr indent="0" marL="0">
-              <a:buNone/>
-            </a:pPr>
             <a:r>
               <a:rPr lang="en-US" sz="1200" dirty="0">
                 <a:solidFill>
@@ -3855,7 +3590,7 @@
           </a:bodyPr>
           <a:lstStyle/>
           <a:p>
-            <a:pPr indent="0" marL="0">
+            <a:pPr marL="0" indent="0">
               <a:buNone/>
             </a:pPr>
             <a:r>
@@ -3866,9 +3601,6 @@
               </a:rPr>
               <a:t>● </a:t>
             </a:r>
-            <a:pPr indent="0" marL="0">
-              <a:buNone/>
-            </a:pPr>
             <a:r>
               <a:rPr lang="en-US" sz="1200" dirty="0">
                 <a:solidFill>
@@ -3902,7 +3634,7 @@
           <a:bodyPr wrap="square" lIns="0" tIns="0" rIns="0" bIns="0" rtlCol="0" anchor="ctr"/>
           <a:lstStyle/>
           <a:p>
-            <a:pPr indent="0" marL="0">
+            <a:pPr marL="0" indent="0">
               <a:buNone/>
             </a:pPr>
             <a:r>
@@ -3938,7 +3670,7 @@
           <a:bodyPr wrap="square" lIns="0" tIns="0" rIns="0" bIns="0" rtlCol="0" anchor="ctr"/>
           <a:lstStyle/>
           <a:p>
-            <a:pPr algn="r" indent="0" marL="0">
+            <a:pPr marL="0" indent="0" algn="r">
               <a:buNone/>
             </a:pPr>
             <a:r>
@@ -3969,6 +3701,7 @@
         <a:solidFill>
           <a:srgbClr val="0B1324"/>
         </a:solidFill>
+        <a:effectLst/>
       </p:bgPr>
     </p:bg>
     <p:spTree>
@@ -4008,7 +3741,7 @@
           </a:bodyPr>
           <a:lstStyle/>
           <a:p>
-            <a:pPr indent="0" marL="0">
+            <a:pPr marL="0" indent="0">
               <a:buNone/>
             </a:pPr>
             <a:r>
@@ -4049,7 +3782,7 @@
           </a:bodyPr>
           <a:lstStyle/>
           <a:p>
-            <a:pPr indent="0" marL="0">
+            <a:pPr marL="0" indent="0">
               <a:buNone/>
             </a:pPr>
             <a:r>
@@ -4110,7 +3843,7 @@
           </a:bodyPr>
           <a:lstStyle/>
           <a:p>
-            <a:pPr indent="0" marL="0">
+            <a:pPr marL="0" indent="0">
               <a:buNone/>
             </a:pPr>
             <a:r>
@@ -4121,9 +3854,6 @@
               </a:rPr>
               <a:t>● </a:t>
             </a:r>
-            <a:pPr indent="0" marL="0">
-              <a:buNone/>
-            </a:pPr>
             <a:r>
               <a:rPr lang="en-US" sz="1300" dirty="0">
                 <a:solidFill>
@@ -4159,7 +3889,7 @@
           </a:bodyPr>
           <a:lstStyle/>
           <a:p>
-            <a:pPr indent="0" marL="0">
+            <a:pPr marL="0" indent="0">
               <a:buNone/>
             </a:pPr>
             <a:r>
@@ -4170,9 +3900,6 @@
               </a:rPr>
               <a:t>● </a:t>
             </a:r>
-            <a:pPr indent="0" marL="0">
-              <a:buNone/>
-            </a:pPr>
             <a:r>
               <a:rPr lang="en-US" sz="1300" dirty="0">
                 <a:solidFill>
@@ -4208,7 +3935,7 @@
           </a:bodyPr>
           <a:lstStyle/>
           <a:p>
-            <a:pPr indent="0" marL="0">
+            <a:pPr marL="0" indent="0">
               <a:buNone/>
             </a:pPr>
             <a:r>
@@ -4219,9 +3946,6 @@
               </a:rPr>
               <a:t>● </a:t>
             </a:r>
-            <a:pPr indent="0" marL="0">
-              <a:buNone/>
-            </a:pPr>
             <a:r>
               <a:rPr lang="en-US" sz="1300" dirty="0">
                 <a:solidFill>
@@ -4257,7 +3981,7 @@
           </a:bodyPr>
           <a:lstStyle/>
           <a:p>
-            <a:pPr indent="0" marL="0">
+            <a:pPr marL="0" indent="0">
               <a:buNone/>
             </a:pPr>
             <a:r>
@@ -4268,9 +3992,6 @@
               </a:rPr>
               <a:t>● </a:t>
             </a:r>
-            <a:pPr indent="0" marL="0">
-              <a:buNone/>
-            </a:pPr>
             <a:r>
               <a:rPr lang="en-US" sz="1300" dirty="0">
                 <a:solidFill>
@@ -4306,7 +4027,7 @@
           </a:bodyPr>
           <a:lstStyle/>
           <a:p>
-            <a:pPr indent="0" marL="0">
+            <a:pPr marL="0" indent="0">
               <a:buNone/>
             </a:pPr>
             <a:r>
@@ -4317,9 +4038,6 @@
               </a:rPr>
               <a:t>● </a:t>
             </a:r>
-            <a:pPr indent="0" marL="0">
-              <a:buNone/>
-            </a:pPr>
             <a:r>
               <a:rPr lang="en-US" sz="1300" dirty="0">
                 <a:solidFill>
@@ -4353,7 +4071,7 @@
           <a:bodyPr wrap="square" lIns="0" tIns="0" rIns="0" bIns="0" rtlCol="0" anchor="ctr"/>
           <a:lstStyle/>
           <a:p>
-            <a:pPr indent="0" marL="0">
+            <a:pPr marL="0" indent="0">
               <a:buNone/>
             </a:pPr>
             <a:r>
@@ -4391,7 +4109,7 @@
           </a:bodyPr>
           <a:lstStyle/>
           <a:p>
-            <a:pPr indent="0" marL="0">
+            <a:pPr marL="0" indent="0">
               <a:buNone/>
             </a:pPr>
             <a:r>
@@ -4427,11 +4145,11 @@
           <a:bodyPr wrap="square" lIns="0" tIns="0" rIns="0" bIns="0" rtlCol="0" anchor="ctr"/>
           <a:lstStyle/>
           <a:p>
-            <a:pPr algn="ctr" indent="0" marL="0">
-              <a:buNone/>
-            </a:pPr>
-            <a:r>
-              <a:rPr lang="en-US" sz="2800" b="1" dirty="0">
+            <a:pPr marL="0" indent="0" algn="ctr">
+              <a:buNone/>
+            </a:pPr>
+            <a:r>
+              <a:rPr lang="en-US" sz="2800" b="1" dirty="0" err="1">
                 <a:solidFill>
                   <a:srgbClr val="EAF2FF"/>
                 </a:solidFill>
@@ -4439,7 +4157,29 @@
                 <a:ea typeface="Aptos Display" pitchFamily="34" charset="-122"/>
                 <a:cs typeface="Aptos Display" pitchFamily="34" charset="-120"/>
               </a:rPr>
-              <a:t>Dziękujemy za uwagę</a:t>
+              <a:t>Dziękuj</a:t>
+            </a:r>
+            <a:r>
+              <a:rPr lang="pl-PL" sz="2800" b="1" dirty="0">
+                <a:solidFill>
+                  <a:srgbClr val="EAF2FF"/>
+                </a:solidFill>
+                <a:latin typeface="Aptos Display" pitchFamily="34" charset="0"/>
+                <a:ea typeface="Aptos Display" pitchFamily="34" charset="-122"/>
+                <a:cs typeface="Aptos Display" pitchFamily="34" charset="-120"/>
+              </a:rPr>
+              <a:t>ę</a:t>
+            </a:r>
+            <a:r>
+              <a:rPr lang="en-US" sz="2800" b="1" dirty="0">
+                <a:solidFill>
+                  <a:srgbClr val="EAF2FF"/>
+                </a:solidFill>
+                <a:latin typeface="Aptos Display" pitchFamily="34" charset="0"/>
+                <a:ea typeface="Aptos Display" pitchFamily="34" charset="-122"/>
+                <a:cs typeface="Aptos Display" pitchFamily="34" charset="-120"/>
+              </a:rPr>
+              <a:t> za uwagę</a:t>
             </a:r>
             <a:endParaRPr lang="en-US" sz="2800" dirty="0"/>
           </a:p>
@@ -4466,7 +4206,7 @@
           <a:bodyPr wrap="square" lIns="0" tIns="0" rIns="0" bIns="0" rtlCol="0" anchor="ctr"/>
           <a:lstStyle/>
           <a:p>
-            <a:pPr indent="0" marL="0">
+            <a:pPr marL="0" indent="0">
               <a:buNone/>
             </a:pPr>
             <a:r>
@@ -4502,7 +4242,7 @@
           <a:bodyPr wrap="square" lIns="0" tIns="0" rIns="0" bIns="0" rtlCol="0" anchor="ctr"/>
           <a:lstStyle/>
           <a:p>
-            <a:pPr algn="r" indent="0" marL="0">
+            <a:pPr marL="0" indent="0" algn="r">
               <a:buNone/>
             </a:pPr>
             <a:r>
@@ -4533,6 +4273,7 @@
         <a:solidFill>
           <a:srgbClr val="0B1324"/>
         </a:solidFill>
+        <a:effectLst/>
       </p:bgPr>
     </p:bg>
     <p:spTree>
@@ -4572,7 +4313,7 @@
           </a:bodyPr>
           <a:lstStyle/>
           <a:p>
-            <a:pPr indent="0" marL="0">
+            <a:pPr marL="0" indent="0">
               <a:buNone/>
             </a:pPr>
             <a:r>
@@ -4613,7 +4354,7 @@
           </a:bodyPr>
           <a:lstStyle/>
           <a:p>
-            <a:pPr indent="0" marL="0">
+            <a:pPr marL="0" indent="0">
               <a:buNone/>
             </a:pPr>
             <a:r>
@@ -4653,14 +4394,14 @@
       </p:sp>
       <p:pic>
         <p:nvPicPr>
-          <p:cNvPr id="5" name="Image 0" descr="/mnt/data/cost_over_time.png">    </p:cNvPr>
+          <p:cNvPr id="5" name="Image 0" descr="/mnt/data/cost_over_time.png"/>
           <p:cNvPicPr>
             <a:picLocks noChangeAspect="1"/>
           </p:cNvPicPr>
           <p:nvPr/>
         </p:nvPicPr>
         <p:blipFill>
-          <a:blip r:embed="rId1"/>
+          <a:blip r:embed="rId3"/>
           <a:stretch>
             <a:fillRect/>
           </a:stretch>
@@ -4696,7 +4437,7 @@
           <a:bodyPr wrap="square" lIns="0" tIns="0" rIns="0" bIns="0" rtlCol="0" anchor="ctr"/>
           <a:lstStyle/>
           <a:p>
-            <a:pPr algn="ctr" indent="0" marL="0">
+            <a:pPr marL="0" indent="0" algn="ctr">
               <a:buNone/>
             </a:pPr>
             <a:r>
@@ -4732,7 +4473,7 @@
           <a:bodyPr wrap="square" lIns="0" tIns="0" rIns="0" bIns="0" rtlCol="0" anchor="ctr"/>
           <a:lstStyle/>
           <a:p>
-            <a:pPr indent="0" marL="0">
+            <a:pPr marL="0" indent="0">
               <a:buNone/>
             </a:pPr>
             <a:r>
@@ -4770,7 +4511,7 @@
           </a:bodyPr>
           <a:lstStyle/>
           <a:p>
-            <a:pPr indent="0" marL="0">
+            <a:pPr marL="0" indent="0">
               <a:buNone/>
             </a:pPr>
             <a:r>
@@ -4781,9 +4522,6 @@
               </a:rPr>
               <a:t>● </a:t>
             </a:r>
-            <a:pPr indent="0" marL="0">
-              <a:buNone/>
-            </a:pPr>
             <a:r>
               <a:rPr lang="en-US" sz="1220" dirty="0">
                 <a:solidFill>
@@ -4819,7 +4557,7 @@
           </a:bodyPr>
           <a:lstStyle/>
           <a:p>
-            <a:pPr indent="0" marL="0">
+            <a:pPr marL="0" indent="0">
               <a:buNone/>
             </a:pPr>
             <a:r>
@@ -4830,9 +4568,6 @@
               </a:rPr>
               <a:t>● </a:t>
             </a:r>
-            <a:pPr indent="0" marL="0">
-              <a:buNone/>
-            </a:pPr>
             <a:r>
               <a:rPr lang="en-US" sz="1220" dirty="0">
                 <a:solidFill>
@@ -4868,7 +4603,7 @@
           </a:bodyPr>
           <a:lstStyle/>
           <a:p>
-            <a:pPr indent="0" marL="0">
+            <a:pPr marL="0" indent="0">
               <a:buNone/>
             </a:pPr>
             <a:r>
@@ -4879,9 +4614,6 @@
               </a:rPr>
               <a:t>● </a:t>
             </a:r>
-            <a:pPr indent="0" marL="0">
-              <a:buNone/>
-            </a:pPr>
             <a:r>
               <a:rPr lang="en-US" sz="1220" dirty="0">
                 <a:solidFill>
@@ -4917,7 +4649,7 @@
           </a:bodyPr>
           <a:lstStyle/>
           <a:p>
-            <a:pPr indent="0" marL="0">
+            <a:pPr marL="0" indent="0">
               <a:buNone/>
             </a:pPr>
             <a:r>
@@ -4928,9 +4660,6 @@
               </a:rPr>
               <a:t>● </a:t>
             </a:r>
-            <a:pPr indent="0" marL="0">
-              <a:buNone/>
-            </a:pPr>
             <a:r>
               <a:rPr lang="en-US" sz="1220" dirty="0">
                 <a:solidFill>
@@ -4966,7 +4695,7 @@
           </a:bodyPr>
           <a:lstStyle/>
           <a:p>
-            <a:pPr indent="0" marL="0">
+            <a:pPr marL="0" indent="0">
               <a:buNone/>
             </a:pPr>
             <a:r>
@@ -4977,9 +4706,6 @@
               </a:rPr>
               <a:t>● </a:t>
             </a:r>
-            <a:pPr indent="0" marL="0">
-              <a:buNone/>
-            </a:pPr>
             <a:r>
               <a:rPr lang="en-US" sz="1220" dirty="0">
                 <a:solidFill>
@@ -5013,7 +4739,7 @@
           <a:bodyPr wrap="square" lIns="0" tIns="0" rIns="0" bIns="0" rtlCol="0" anchor="ctr"/>
           <a:lstStyle/>
           <a:p>
-            <a:pPr indent="0" marL="0">
+            <a:pPr marL="0" indent="0">
               <a:buNone/>
             </a:pPr>
             <a:r>
@@ -5051,7 +4777,7 @@
           </a:bodyPr>
           <a:lstStyle/>
           <a:p>
-            <a:pPr indent="0" marL="0">
+            <a:pPr marL="0" indent="0">
               <a:buNone/>
             </a:pPr>
             <a:r>
@@ -5087,7 +4813,7 @@
           <a:bodyPr wrap="square" lIns="0" tIns="0" rIns="0" bIns="0" rtlCol="0" anchor="ctr"/>
           <a:lstStyle/>
           <a:p>
-            <a:pPr indent="0" marL="0">
+            <a:pPr marL="0" indent="0">
               <a:buNone/>
             </a:pPr>
             <a:r>
@@ -5123,7 +4849,7 @@
           <a:bodyPr wrap="square" lIns="0" tIns="0" rIns="0" bIns="0" rtlCol="0" anchor="ctr"/>
           <a:lstStyle/>
           <a:p>
-            <a:pPr algn="r" indent="0" marL="0">
+            <a:pPr marL="0" indent="0" algn="r">
               <a:buNone/>
             </a:pPr>
             <a:r>
@@ -5154,6 +4880,7 @@
         <a:solidFill>
           <a:srgbClr val="0B1324"/>
         </a:solidFill>
+        <a:effectLst/>
       </p:bgPr>
     </p:bg>
     <p:spTree>
@@ -5193,7 +4920,7 @@
           </a:bodyPr>
           <a:lstStyle/>
           <a:p>
-            <a:pPr indent="0" marL="0">
+            <a:pPr marL="0" indent="0">
               <a:buNone/>
             </a:pPr>
             <a:r>
@@ -5234,7 +4961,7 @@
           </a:bodyPr>
           <a:lstStyle/>
           <a:p>
-            <a:pPr indent="0" marL="0">
+            <a:pPr marL="0" indent="0">
               <a:buNone/>
             </a:pPr>
             <a:r>
@@ -5274,14 +5001,14 @@
       </p:sp>
       <p:pic>
         <p:nvPicPr>
-          <p:cNvPr id="5" name="Image 0" descr="/mnt/data/class_distribution.png">    </p:cNvPr>
+          <p:cNvPr id="5" name="Image 0" descr="/mnt/data/class_distribution.png"/>
           <p:cNvPicPr>
             <a:picLocks noChangeAspect="1"/>
           </p:cNvPicPr>
           <p:nvPr/>
         </p:nvPicPr>
         <p:blipFill>
-          <a:blip r:embed="rId1"/>
+          <a:blip r:embed="rId3"/>
           <a:stretch>
             <a:fillRect/>
           </a:stretch>
@@ -5317,7 +5044,7 @@
           <a:bodyPr wrap="square" lIns="0" tIns="0" rIns="0" bIns="0" rtlCol="0" anchor="ctr"/>
           <a:lstStyle/>
           <a:p>
-            <a:pPr algn="ctr" indent="0" marL="0">
+            <a:pPr marL="0" indent="0" algn="ctr">
               <a:buNone/>
             </a:pPr>
             <a:r>
@@ -5353,7 +5080,7 @@
           <a:bodyPr wrap="square" lIns="0" tIns="0" rIns="0" bIns="0" rtlCol="0" anchor="ctr"/>
           <a:lstStyle/>
           <a:p>
-            <a:pPr algn="ctr" indent="0" marL="0">
+            <a:pPr marL="0" indent="0" algn="ctr">
               <a:buNone/>
             </a:pPr>
             <a:r>
@@ -5389,7 +5116,7 @@
           <a:bodyPr wrap="square" lIns="0" tIns="0" rIns="0" bIns="0" rtlCol="0" anchor="ctr"/>
           <a:lstStyle/>
           <a:p>
-            <a:pPr algn="ctr" indent="0" marL="0">
+            <a:pPr marL="0" indent="0" algn="ctr">
               <a:buNone/>
             </a:pPr>
             <a:r>
@@ -5425,7 +5152,7 @@
           <a:bodyPr wrap="square" lIns="0" tIns="0" rIns="0" bIns="0" rtlCol="0" anchor="ctr"/>
           <a:lstStyle/>
           <a:p>
-            <a:pPr algn="ctr" indent="0" marL="0">
+            <a:pPr marL="0" indent="0" algn="ctr">
               <a:buNone/>
             </a:pPr>
             <a:r>
@@ -5461,7 +5188,7 @@
           <a:bodyPr wrap="square" lIns="0" tIns="0" rIns="0" bIns="0" rtlCol="0" anchor="ctr"/>
           <a:lstStyle/>
           <a:p>
-            <a:pPr algn="ctr" indent="0" marL="0">
+            <a:pPr marL="0" indent="0" algn="ctr">
               <a:buNone/>
             </a:pPr>
             <a:r>
@@ -5497,7 +5224,7 @@
           <a:bodyPr wrap="square" lIns="0" tIns="0" rIns="0" bIns="0" rtlCol="0" anchor="ctr"/>
           <a:lstStyle/>
           <a:p>
-            <a:pPr algn="ctr" indent="0" marL="0">
+            <a:pPr marL="0" indent="0" algn="ctr">
               <a:buNone/>
             </a:pPr>
             <a:r>
@@ -5533,7 +5260,7 @@
           <a:bodyPr wrap="square" lIns="0" tIns="0" rIns="0" bIns="0" rtlCol="0" anchor="ctr"/>
           <a:lstStyle/>
           <a:p>
-            <a:pPr algn="ctr" indent="0" marL="0">
+            <a:pPr marL="0" indent="0" algn="ctr">
               <a:buNone/>
             </a:pPr>
             <a:r>
@@ -5569,7 +5296,7 @@
           <a:bodyPr wrap="square" lIns="0" tIns="0" rIns="0" bIns="0" rtlCol="0" anchor="ctr"/>
           <a:lstStyle/>
           <a:p>
-            <a:pPr algn="ctr" indent="0" marL="0">
+            <a:pPr marL="0" indent="0" algn="ctr">
               <a:buNone/>
             </a:pPr>
             <a:r>
@@ -5605,7 +5332,7 @@
           <a:bodyPr wrap="square" lIns="0" tIns="0" rIns="0" bIns="0" rtlCol="0" anchor="ctr"/>
           <a:lstStyle/>
           <a:p>
-            <a:pPr algn="ctr" indent="0" marL="0">
+            <a:pPr marL="0" indent="0" algn="ctr">
               <a:buNone/>
             </a:pPr>
             <a:r>
@@ -5643,7 +5370,7 @@
           </a:bodyPr>
           <a:lstStyle/>
           <a:p>
-            <a:pPr indent="0" marL="0">
+            <a:pPr marL="0" indent="0">
               <a:buNone/>
             </a:pPr>
             <a:r>
@@ -5660,7 +5387,7 @@
             <a:endParaRPr lang="en-US" sz="720" dirty="0"/>
           </a:p>
           <a:p>
-            <a:pPr indent="0" marL="0">
+            <a:pPr marL="0" indent="0">
               <a:buNone/>
             </a:pPr>
             <a:r>
@@ -5677,7 +5404,7 @@
             <a:endParaRPr lang="en-US" sz="720" dirty="0"/>
           </a:p>
           <a:p>
-            <a:pPr indent="0" marL="0">
+            <a:pPr marL="0" indent="0">
               <a:buNone/>
             </a:pPr>
             <a:r>
@@ -5694,7 +5421,7 @@
             <a:endParaRPr lang="en-US" sz="720" dirty="0"/>
           </a:p>
           <a:p>
-            <a:pPr indent="0" marL="0">
+            <a:pPr marL="0" indent="0">
               <a:buNone/>
             </a:pPr>
             <a:r>
@@ -5711,7 +5438,7 @@
             <a:endParaRPr lang="en-US" sz="720" dirty="0"/>
           </a:p>
           <a:p>
-            <a:pPr indent="0" marL="0">
+            <a:pPr marL="0" indent="0">
               <a:buNone/>
             </a:pPr>
             <a:r>
@@ -5728,7 +5455,7 @@
             <a:endParaRPr lang="en-US" sz="720" dirty="0"/>
           </a:p>
           <a:p>
-            <a:pPr indent="0" marL="0">
+            <a:pPr marL="0" indent="0">
               <a:buNone/>
             </a:pPr>
             <a:r>
@@ -5745,7 +5472,7 @@
             <a:endParaRPr lang="en-US" sz="720" dirty="0"/>
           </a:p>
           <a:p>
-            <a:pPr indent="0" marL="0">
+            <a:pPr marL="0" indent="0">
               <a:buNone/>
             </a:pPr>
             <a:r>
@@ -5784,7 +5511,7 @@
           <a:bodyPr wrap="square" lIns="0" tIns="0" rIns="0" bIns="0" rtlCol="0" anchor="ctr"/>
           <a:lstStyle/>
           <a:p>
-            <a:pPr indent="0" marL="0">
+            <a:pPr marL="0" indent="0">
               <a:buNone/>
             </a:pPr>
             <a:r>
@@ -5820,7 +5547,7 @@
           <a:bodyPr wrap="square" lIns="0" tIns="0" rIns="0" bIns="0" rtlCol="0" anchor="ctr"/>
           <a:lstStyle/>
           <a:p>
-            <a:pPr indent="0" marL="0">
+            <a:pPr marL="0" indent="0">
               <a:buNone/>
             </a:pPr>
             <a:r>
@@ -5856,7 +5583,7 @@
           <a:bodyPr wrap="square" lIns="0" tIns="0" rIns="0" bIns="0" rtlCol="0" anchor="ctr"/>
           <a:lstStyle/>
           <a:p>
-            <a:pPr algn="r" indent="0" marL="0">
+            <a:pPr marL="0" indent="0" algn="r">
               <a:buNone/>
             </a:pPr>
             <a:r>
@@ -5887,6 +5614,7 @@
         <a:solidFill>
           <a:srgbClr val="0B1324"/>
         </a:solidFill>
+        <a:effectLst/>
       </p:bgPr>
     </p:bg>
     <p:spTree>
@@ -5926,7 +5654,7 @@
           </a:bodyPr>
           <a:lstStyle/>
           <a:p>
-            <a:pPr indent="0" marL="0">
+            <a:pPr marL="0" indent="0">
               <a:buNone/>
             </a:pPr>
             <a:r>
@@ -5967,7 +5695,7 @@
           </a:bodyPr>
           <a:lstStyle/>
           <a:p>
-            <a:pPr indent="0" marL="0">
+            <a:pPr marL="0" indent="0">
               <a:buNone/>
             </a:pPr>
             <a:r>
@@ -6026,7 +5754,7 @@
           <a:bodyPr wrap="square" lIns="0" tIns="0" rIns="0" bIns="0" rtlCol="0" anchor="ctr"/>
           <a:lstStyle/>
           <a:p>
-            <a:pPr indent="0" marL="0">
+            <a:pPr marL="0" indent="0">
               <a:buNone/>
             </a:pPr>
             <a:r>
@@ -6064,7 +5792,7 @@
           </a:bodyPr>
           <a:lstStyle/>
           <a:p>
-            <a:pPr indent="0" marL="0">
+            <a:pPr marL="0" indent="0">
               <a:buNone/>
             </a:pPr>
             <a:r>
@@ -6078,7 +5806,7 @@
             <a:endParaRPr lang="en-US" sz="1200" dirty="0"/>
           </a:p>
           <a:p>
-            <a:pPr indent="0" marL="0">
+            <a:pPr marL="0" indent="0">
               <a:buNone/>
             </a:pPr>
             <a:r>
@@ -6114,7 +5842,7 @@
           <a:bodyPr wrap="square" lIns="0" tIns="0" rIns="0" bIns="0" rtlCol="0" anchor="ctr"/>
           <a:lstStyle/>
           <a:p>
-            <a:pPr indent="0" marL="0">
+            <a:pPr marL="0" indent="0">
               <a:buNone/>
             </a:pPr>
             <a:r>
@@ -6152,7 +5880,7 @@
           </a:bodyPr>
           <a:lstStyle/>
           <a:p>
-            <a:pPr indent="0" marL="0">
+            <a:pPr marL="0" indent="0">
               <a:buNone/>
             </a:pPr>
             <a:r>
@@ -6166,7 +5894,7 @@
             <a:endParaRPr lang="en-US" sz="1200" dirty="0"/>
           </a:p>
           <a:p>
-            <a:pPr indent="0" marL="0">
+            <a:pPr marL="0" indent="0">
               <a:buNone/>
             </a:pPr>
             <a:r>
@@ -6202,7 +5930,7 @@
           <a:bodyPr wrap="square" lIns="0" tIns="0" rIns="0" bIns="0" rtlCol="0" anchor="ctr"/>
           <a:lstStyle/>
           <a:p>
-            <a:pPr indent="0" marL="0">
+            <a:pPr marL="0" indent="0">
               <a:buNone/>
             </a:pPr>
             <a:r>
@@ -6240,7 +5968,7 @@
           </a:bodyPr>
           <a:lstStyle/>
           <a:p>
-            <a:pPr indent="0" marL="0">
+            <a:pPr marL="0" indent="0">
               <a:buNone/>
             </a:pPr>
             <a:r>
@@ -6254,7 +5982,7 @@
             <a:endParaRPr lang="en-US" sz="1200" dirty="0"/>
           </a:p>
           <a:p>
-            <a:pPr indent="0" marL="0">
+            <a:pPr marL="0" indent="0">
               <a:buNone/>
             </a:pPr>
             <a:r>
@@ -6290,7 +6018,7 @@
           <a:bodyPr wrap="square" lIns="0" tIns="0" rIns="0" bIns="0" rtlCol="0" anchor="ctr"/>
           <a:lstStyle/>
           <a:p>
-            <a:pPr indent="0" marL="0">
+            <a:pPr marL="0" indent="0">
               <a:buNone/>
             </a:pPr>
             <a:r>
@@ -6328,7 +6056,7 @@
           </a:bodyPr>
           <a:lstStyle/>
           <a:p>
-            <a:pPr indent="0" marL="0">
+            <a:pPr marL="0" indent="0">
               <a:buNone/>
             </a:pPr>
             <a:r>
@@ -6342,7 +6070,7 @@
             <a:endParaRPr lang="en-US" sz="1200" dirty="0"/>
           </a:p>
           <a:p>
-            <a:pPr indent="0" marL="0">
+            <a:pPr marL="0" indent="0">
               <a:buNone/>
             </a:pPr>
             <a:r>
@@ -6401,7 +6129,7 @@
           <a:bodyPr wrap="square" lIns="0" tIns="0" rIns="0" bIns="0" rtlCol="0" anchor="ctr"/>
           <a:lstStyle/>
           <a:p>
-            <a:pPr indent="0" marL="0">
+            <a:pPr marL="0" indent="0">
               <a:buNone/>
             </a:pPr>
             <a:r>
@@ -6439,7 +6167,7 @@
           </a:bodyPr>
           <a:lstStyle/>
           <a:p>
-            <a:pPr indent="0" marL="0">
+            <a:pPr marL="0" indent="0">
               <a:buNone/>
             </a:pPr>
             <a:r>
@@ -6450,9 +6178,6 @@
               </a:rPr>
               <a:t>● </a:t>
             </a:r>
-            <a:pPr indent="0" marL="0">
-              <a:buNone/>
-            </a:pPr>
             <a:r>
               <a:rPr lang="en-US" sz="1180" dirty="0">
                 <a:solidFill>
@@ -6488,7 +6213,7 @@
           </a:bodyPr>
           <a:lstStyle/>
           <a:p>
-            <a:pPr indent="0" marL="0">
+            <a:pPr marL="0" indent="0">
               <a:buNone/>
             </a:pPr>
             <a:r>
@@ -6499,9 +6224,6 @@
               </a:rPr>
               <a:t>● </a:t>
             </a:r>
-            <a:pPr indent="0" marL="0">
-              <a:buNone/>
-            </a:pPr>
             <a:r>
               <a:rPr lang="en-US" sz="1180" dirty="0">
                 <a:solidFill>
@@ -6537,7 +6259,7 @@
           </a:bodyPr>
           <a:lstStyle/>
           <a:p>
-            <a:pPr indent="0" marL="0">
+            <a:pPr marL="0" indent="0">
               <a:buNone/>
             </a:pPr>
             <a:r>
@@ -6548,9 +6270,6 @@
               </a:rPr>
               <a:t>● </a:t>
             </a:r>
-            <a:pPr indent="0" marL="0">
-              <a:buNone/>
-            </a:pPr>
             <a:r>
               <a:rPr lang="en-US" sz="1180" dirty="0">
                 <a:solidFill>
@@ -6584,7 +6303,7 @@
           <a:bodyPr wrap="square" lIns="0" tIns="0" rIns="0" bIns="0" rtlCol="0" anchor="ctr"/>
           <a:lstStyle/>
           <a:p>
-            <a:pPr indent="0" marL="0">
+            <a:pPr marL="0" indent="0">
               <a:buNone/>
             </a:pPr>
             <a:r>
@@ -6622,7 +6341,7 @@
           </a:bodyPr>
           <a:lstStyle/>
           <a:p>
-            <a:pPr indent="0" marL="0">
+            <a:pPr marL="0" indent="0">
               <a:buNone/>
             </a:pPr>
             <a:r>
@@ -6636,7 +6355,7 @@
             <a:endParaRPr lang="en-US" sz="1200" dirty="0"/>
           </a:p>
           <a:p>
-            <a:pPr indent="0" marL="0">
+            <a:pPr marL="0" indent="0">
               <a:buNone/>
             </a:pPr>
             <a:r>
@@ -6672,7 +6391,7 @@
           <a:bodyPr wrap="square" lIns="0" tIns="0" rIns="0" bIns="0" rtlCol="0" anchor="ctr"/>
           <a:lstStyle/>
           <a:p>
-            <a:pPr indent="0" marL="0">
+            <a:pPr marL="0" indent="0">
               <a:buNone/>
             </a:pPr>
             <a:r>
@@ -6708,7 +6427,7 @@
           <a:bodyPr wrap="square" lIns="0" tIns="0" rIns="0" bIns="0" rtlCol="0" anchor="ctr"/>
           <a:lstStyle/>
           <a:p>
-            <a:pPr algn="r" indent="0" marL="0">
+            <a:pPr marL="0" indent="0" algn="r">
               <a:buNone/>
             </a:pPr>
             <a:r>
@@ -6739,6 +6458,7 @@
         <a:solidFill>
           <a:srgbClr val="0B1324"/>
         </a:solidFill>
+        <a:effectLst/>
       </p:bgPr>
     </p:bg>
     <p:spTree>
@@ -6778,7 +6498,7 @@
           </a:bodyPr>
           <a:lstStyle/>
           <a:p>
-            <a:pPr indent="0" marL="0">
+            <a:pPr marL="0" indent="0">
               <a:buNone/>
             </a:pPr>
             <a:r>
@@ -6819,7 +6539,7 @@
           </a:bodyPr>
           <a:lstStyle/>
           <a:p>
-            <a:pPr indent="0" marL="0">
+            <a:pPr marL="0" indent="0">
               <a:buNone/>
             </a:pPr>
             <a:r>
@@ -7048,7 +6768,7 @@
           </a:bodyPr>
           <a:lstStyle/>
           <a:p>
-            <a:pPr algn="ctr" indent="0" marL="0">
+            <a:pPr marL="0" indent="0" algn="ctr">
               <a:buNone/>
             </a:pPr>
             <a:r>
@@ -7086,7 +6806,7 @@
           </a:bodyPr>
           <a:lstStyle/>
           <a:p>
-            <a:pPr algn="ctr" indent="0" marL="0">
+            <a:pPr marL="0" indent="0" algn="ctr">
               <a:buNone/>
             </a:pPr>
             <a:r>
@@ -7124,7 +6844,7 @@
           </a:bodyPr>
           <a:lstStyle/>
           <a:p>
-            <a:pPr algn="ctr" indent="0" marL="0">
+            <a:pPr marL="0" indent="0" algn="ctr">
               <a:buNone/>
             </a:pPr>
             <a:r>
@@ -7162,7 +6882,7 @@
           </a:bodyPr>
           <a:lstStyle/>
           <a:p>
-            <a:pPr algn="ctr" indent="0" marL="0">
+            <a:pPr marL="0" indent="0" algn="ctr">
               <a:buNone/>
             </a:pPr>
             <a:r>
@@ -7200,7 +6920,7 @@
           </a:bodyPr>
           <a:lstStyle/>
           <a:p>
-            <a:pPr algn="ctr" indent="0" marL="0">
+            <a:pPr marL="0" indent="0" algn="ctr">
               <a:buNone/>
             </a:pPr>
             <a:r>
@@ -7238,7 +6958,7 @@
           </a:bodyPr>
           <a:lstStyle/>
           <a:p>
-            <a:pPr algn="ctr" indent="0" marL="0">
+            <a:pPr marL="0" indent="0" algn="ctr">
               <a:buNone/>
             </a:pPr>
             <a:r>
@@ -7276,7 +6996,7 @@
           </a:bodyPr>
           <a:lstStyle/>
           <a:p>
-            <a:pPr algn="ctr" indent="0" marL="0">
+            <a:pPr marL="0" indent="0" algn="ctr">
               <a:buNone/>
             </a:pPr>
             <a:r>
@@ -7314,7 +7034,7 @@
           </a:bodyPr>
           <a:lstStyle/>
           <a:p>
-            <a:pPr algn="ctr" indent="0" marL="0">
+            <a:pPr marL="0" indent="0" algn="ctr">
               <a:buNone/>
             </a:pPr>
             <a:r>
@@ -7375,7 +7095,7 @@
           </a:bodyPr>
           <a:lstStyle/>
           <a:p>
-            <a:pPr indent="0" marL="0">
+            <a:pPr marL="0" indent="0">
               <a:buNone/>
             </a:pPr>
             <a:r>
@@ -7386,9 +7106,6 @@
               </a:rPr>
               <a:t>● </a:t>
             </a:r>
-            <a:pPr indent="0" marL="0">
-              <a:buNone/>
-            </a:pPr>
             <a:r>
               <a:rPr lang="en-US" sz="1300" dirty="0">
                 <a:solidFill>
@@ -7424,7 +7141,7 @@
           </a:bodyPr>
           <a:lstStyle/>
           <a:p>
-            <a:pPr indent="0" marL="0">
+            <a:pPr marL="0" indent="0">
               <a:buNone/>
             </a:pPr>
             <a:r>
@@ -7435,9 +7152,6 @@
               </a:rPr>
               <a:t>● </a:t>
             </a:r>
-            <a:pPr indent="0" marL="0">
-              <a:buNone/>
-            </a:pPr>
             <a:r>
               <a:rPr lang="en-US" sz="1300" dirty="0">
                 <a:solidFill>
@@ -7473,7 +7187,7 @@
           </a:bodyPr>
           <a:lstStyle/>
           <a:p>
-            <a:pPr indent="0" marL="0">
+            <a:pPr marL="0" indent="0">
               <a:buNone/>
             </a:pPr>
             <a:r>
@@ -7484,9 +7198,6 @@
               </a:rPr>
               <a:t>● </a:t>
             </a:r>
-            <a:pPr indent="0" marL="0">
-              <a:buNone/>
-            </a:pPr>
             <a:r>
               <a:rPr lang="en-US" sz="1300" dirty="0">
                 <a:solidFill>
@@ -7522,7 +7233,7 @@
           </a:bodyPr>
           <a:lstStyle/>
           <a:p>
-            <a:pPr indent="0" marL="0">
+            <a:pPr marL="0" indent="0">
               <a:buNone/>
             </a:pPr>
             <a:r>
@@ -7533,9 +7244,6 @@
               </a:rPr>
               <a:t>● </a:t>
             </a:r>
-            <a:pPr indent="0" marL="0">
-              <a:buNone/>
-            </a:pPr>
             <a:r>
               <a:rPr lang="en-US" sz="1300" dirty="0">
                 <a:solidFill>
@@ -7569,7 +7277,7 @@
           <a:bodyPr wrap="square" lIns="0" tIns="0" rIns="0" bIns="0" rtlCol="0" anchor="ctr"/>
           <a:lstStyle/>
           <a:p>
-            <a:pPr indent="0" marL="0">
+            <a:pPr marL="0" indent="0">
               <a:buNone/>
             </a:pPr>
             <a:r>
@@ -7605,7 +7313,7 @@
           <a:bodyPr wrap="square" lIns="0" tIns="0" rIns="0" bIns="0" rtlCol="0" anchor="ctr"/>
           <a:lstStyle/>
           <a:p>
-            <a:pPr algn="r" indent="0" marL="0">
+            <a:pPr marL="0" indent="0" algn="r">
               <a:buNone/>
             </a:pPr>
             <a:r>
@@ -7636,6 +7344,7 @@
         <a:solidFill>
           <a:srgbClr val="0B1324"/>
         </a:solidFill>
+        <a:effectLst/>
       </p:bgPr>
     </p:bg>
     <p:spTree>
@@ -7675,7 +7384,7 @@
           </a:bodyPr>
           <a:lstStyle/>
           <a:p>
-            <a:pPr indent="0" marL="0">
+            <a:pPr marL="0" indent="0">
               <a:buNone/>
             </a:pPr>
             <a:r>
@@ -7716,7 +7425,7 @@
           </a:bodyPr>
           <a:lstStyle/>
           <a:p>
-            <a:pPr indent="0" marL="0">
+            <a:pPr marL="0" indent="0">
               <a:buNone/>
             </a:pPr>
             <a:r>
@@ -7775,7 +7484,7 @@
           <a:bodyPr wrap="square" lIns="0" tIns="0" rIns="0" bIns="0" rtlCol="0" anchor="ctr"/>
           <a:lstStyle/>
           <a:p>
-            <a:pPr indent="0" marL="0">
+            <a:pPr marL="0" indent="0">
               <a:buNone/>
             </a:pPr>
             <a:r>
@@ -7813,7 +7522,7 @@
           </a:bodyPr>
           <a:lstStyle/>
           <a:p>
-            <a:pPr indent="0" marL="0">
+            <a:pPr marL="0" indent="0">
               <a:buNone/>
             </a:pPr>
             <a:r>
@@ -7849,7 +7558,7 @@
           <a:bodyPr wrap="square" lIns="0" tIns="0" rIns="0" bIns="0" rtlCol="0" anchor="ctr"/>
           <a:lstStyle/>
           <a:p>
-            <a:pPr indent="0" marL="0">
+            <a:pPr marL="0" indent="0">
               <a:buNone/>
             </a:pPr>
             <a:r>
@@ -7887,7 +7596,7 @@
           </a:bodyPr>
           <a:lstStyle/>
           <a:p>
-            <a:pPr indent="0" marL="0">
+            <a:pPr marL="0" indent="0">
               <a:buNone/>
             </a:pPr>
             <a:r>
@@ -7923,7 +7632,7 @@
           <a:bodyPr wrap="square" lIns="0" tIns="0" rIns="0" bIns="0" rtlCol="0" anchor="ctr"/>
           <a:lstStyle/>
           <a:p>
-            <a:pPr indent="0" marL="0">
+            <a:pPr marL="0" indent="0">
               <a:buNone/>
             </a:pPr>
             <a:r>
@@ -7961,7 +7670,7 @@
           </a:bodyPr>
           <a:lstStyle/>
           <a:p>
-            <a:pPr indent="0" marL="0">
+            <a:pPr marL="0" indent="0">
               <a:buNone/>
             </a:pPr>
             <a:r>
@@ -7997,7 +7706,7 @@
           <a:bodyPr wrap="square" lIns="0" tIns="0" rIns="0" bIns="0" rtlCol="0" anchor="ctr"/>
           <a:lstStyle/>
           <a:p>
-            <a:pPr indent="0" marL="0">
+            <a:pPr marL="0" indent="0">
               <a:buNone/>
             </a:pPr>
             <a:r>
@@ -8035,7 +7744,7 @@
           </a:bodyPr>
           <a:lstStyle/>
           <a:p>
-            <a:pPr indent="0" marL="0">
+            <a:pPr marL="0" indent="0">
               <a:buNone/>
             </a:pPr>
             <a:r>
@@ -8094,7 +7803,7 @@
           <a:bodyPr wrap="square" lIns="0" tIns="0" rIns="0" bIns="0" rtlCol="0" anchor="ctr"/>
           <a:lstStyle/>
           <a:p>
-            <a:pPr indent="0" marL="0">
+            <a:pPr marL="0" indent="0">
               <a:buNone/>
             </a:pPr>
             <a:r>
@@ -8132,7 +7841,7 @@
           </a:bodyPr>
           <a:lstStyle/>
           <a:p>
-            <a:pPr indent="0" marL="0">
+            <a:pPr marL="0" indent="0">
               <a:buNone/>
             </a:pPr>
             <a:r>
@@ -8168,7 +7877,7 @@
           <a:bodyPr wrap="square" lIns="0" tIns="0" rIns="0" bIns="0" rtlCol="0" anchor="ctr"/>
           <a:lstStyle/>
           <a:p>
-            <a:pPr indent="0" marL="0">
+            <a:pPr marL="0" indent="0">
               <a:buNone/>
             </a:pPr>
             <a:r>
@@ -8204,7 +7913,7 @@
           <a:bodyPr wrap="square" lIns="0" tIns="0" rIns="0" bIns="0" rtlCol="0" anchor="ctr"/>
           <a:lstStyle/>
           <a:p>
-            <a:pPr algn="r" indent="0" marL="0">
+            <a:pPr marL="0" indent="0" algn="r">
               <a:buNone/>
             </a:pPr>
             <a:r>
@@ -8235,6 +7944,7 @@
         <a:solidFill>
           <a:srgbClr val="0B1324"/>
         </a:solidFill>
+        <a:effectLst/>
       </p:bgPr>
     </p:bg>
     <p:spTree>
@@ -8274,7 +7984,7 @@
           </a:bodyPr>
           <a:lstStyle/>
           <a:p>
-            <a:pPr indent="0" marL="0">
+            <a:pPr marL="0" indent="0">
               <a:buNone/>
             </a:pPr>
             <a:r>
@@ -8315,7 +8025,7 @@
           </a:bodyPr>
           <a:lstStyle/>
           <a:p>
-            <a:pPr indent="0" marL="0">
+            <a:pPr marL="0" indent="0">
               <a:buNone/>
             </a:pPr>
             <a:r>
@@ -8355,14 +8065,14 @@
       </p:sp>
       <p:pic>
         <p:nvPicPr>
-          <p:cNvPr id="5" name="Image 0" descr="/mnt/data/model_comparison.png">    </p:cNvPr>
+          <p:cNvPr id="5" name="Image 0" descr="/mnt/data/model_comparison.png"/>
           <p:cNvPicPr>
             <a:picLocks noChangeAspect="1"/>
           </p:cNvPicPr>
           <p:nvPr/>
         </p:nvPicPr>
         <p:blipFill>
-          <a:blip r:embed="rId1"/>
+          <a:blip r:embed="rId3"/>
           <a:stretch>
             <a:fillRect/>
           </a:stretch>
@@ -8398,7 +8108,7 @@
           <a:bodyPr wrap="square" lIns="0" tIns="0" rIns="0" bIns="0" rtlCol="0" anchor="ctr"/>
           <a:lstStyle/>
           <a:p>
-            <a:pPr algn="ctr" indent="0" marL="0">
+            <a:pPr marL="0" indent="0" algn="ctr">
               <a:buNone/>
             </a:pPr>
             <a:r>
@@ -8434,7 +8144,7 @@
           <a:bodyPr wrap="square" lIns="0" tIns="0" rIns="0" bIns="0" rtlCol="0" anchor="ctr"/>
           <a:lstStyle/>
           <a:p>
-            <a:pPr algn="ctr" indent="0" marL="0">
+            <a:pPr marL="0" indent="0" algn="ctr">
               <a:buNone/>
             </a:pPr>
             <a:r>
@@ -8472,7 +8182,7 @@
           </a:bodyPr>
           <a:lstStyle/>
           <a:p>
-            <a:pPr algn="ctr" indent="0" marL="0">
+            <a:pPr marL="0" indent="0" algn="ctr">
               <a:buNone/>
             </a:pPr>
             <a:r>
@@ -8486,7 +8196,7 @@
             <a:endParaRPr lang="en-US" sz="1220" dirty="0"/>
           </a:p>
           <a:p>
-            <a:pPr algn="ctr" indent="0" marL="0">
+            <a:pPr marL="0" indent="0" algn="ctr">
               <a:buNone/>
             </a:pPr>
             <a:r>
@@ -8500,7 +8210,7 @@
             <a:endParaRPr lang="en-US" sz="1220" dirty="0"/>
           </a:p>
           <a:p>
-            <a:pPr algn="ctr" indent="0" marL="0">
+            <a:pPr marL="0" indent="0" algn="ctr">
               <a:buNone/>
             </a:pPr>
             <a:r>
@@ -8514,7 +8224,7 @@
             <a:endParaRPr lang="en-US" sz="1220" dirty="0"/>
           </a:p>
           <a:p>
-            <a:pPr algn="ctr" indent="0" marL="0">
+            <a:pPr marL="0" indent="0" algn="ctr">
               <a:buNone/>
             </a:pPr>
             <a:r>
@@ -8550,7 +8260,7 @@
           <a:bodyPr wrap="square" lIns="0" tIns="0" rIns="0" bIns="0" rtlCol="0" anchor="ctr"/>
           <a:lstStyle/>
           <a:p>
-            <a:pPr algn="ctr" indent="0" marL="0">
+            <a:pPr marL="0" indent="0" algn="ctr">
               <a:buNone/>
             </a:pPr>
             <a:r>
@@ -8588,7 +8298,7 @@
           </a:bodyPr>
           <a:lstStyle/>
           <a:p>
-            <a:pPr algn="ctr" indent="0" marL="0">
+            <a:pPr marL="0" indent="0" algn="ctr">
               <a:buNone/>
             </a:pPr>
             <a:r>
@@ -8624,7 +8334,7 @@
           <a:bodyPr wrap="square" lIns="0" tIns="0" rIns="0" bIns="0" rtlCol="0" anchor="ctr"/>
           <a:lstStyle/>
           <a:p>
-            <a:pPr indent="0" marL="0">
+            <a:pPr marL="0" indent="0">
               <a:buNone/>
             </a:pPr>
             <a:r>
@@ -8662,7 +8372,7 @@
           </a:bodyPr>
           <a:lstStyle/>
           <a:p>
-            <a:pPr indent="0" marL="0">
+            <a:pPr marL="0" indent="0">
               <a:buNone/>
             </a:pPr>
             <a:r>
@@ -8676,7 +8386,7 @@
             <a:endParaRPr lang="en-US" sz="1150" dirty="0"/>
           </a:p>
           <a:p>
-            <a:pPr indent="0" marL="0">
+            <a:pPr marL="0" indent="0">
               <a:buNone/>
             </a:pPr>
             <a:r>
@@ -8712,7 +8422,7 @@
           <a:bodyPr wrap="square" lIns="0" tIns="0" rIns="0" bIns="0" rtlCol="0" anchor="ctr"/>
           <a:lstStyle/>
           <a:p>
-            <a:pPr algn="ctr" indent="0" marL="0">
+            <a:pPr marL="0" indent="0" algn="ctr">
               <a:buNone/>
             </a:pPr>
             <a:r>
@@ -8750,7 +8460,7 @@
           </a:bodyPr>
           <a:lstStyle/>
           <a:p>
-            <a:pPr algn="ctr" indent="0" marL="0">
+            <a:pPr marL="0" indent="0" algn="ctr">
               <a:buNone/>
             </a:pPr>
             <a:r>
@@ -8786,7 +8496,7 @@
           <a:bodyPr wrap="square" lIns="0" tIns="0" rIns="0" bIns="0" rtlCol="0" anchor="ctr"/>
           <a:lstStyle/>
           <a:p>
-            <a:pPr indent="0" marL="0">
+            <a:pPr marL="0" indent="0">
               <a:buNone/>
             </a:pPr>
             <a:r>
@@ -8822,7 +8532,7 @@
           <a:bodyPr wrap="square" lIns="0" tIns="0" rIns="0" bIns="0" rtlCol="0" anchor="ctr"/>
           <a:lstStyle/>
           <a:p>
-            <a:pPr algn="r" indent="0" marL="0">
+            <a:pPr marL="0" indent="0" algn="r">
               <a:buNone/>
             </a:pPr>
             <a:r>
@@ -8853,6 +8563,7 @@
         <a:solidFill>
           <a:srgbClr val="0B1324"/>
         </a:solidFill>
+        <a:effectLst/>
       </p:bgPr>
     </p:bg>
     <p:spTree>
@@ -8892,7 +8603,7 @@
           </a:bodyPr>
           <a:lstStyle/>
           <a:p>
-            <a:pPr indent="0" marL="0">
+            <a:pPr marL="0" indent="0">
               <a:buNone/>
             </a:pPr>
             <a:r>
@@ -8933,7 +8644,7 @@
           </a:bodyPr>
           <a:lstStyle/>
           <a:p>
-            <a:pPr indent="0" marL="0">
+            <a:pPr marL="0" indent="0">
               <a:buNone/>
             </a:pPr>
             <a:r>
@@ -8973,14 +8684,14 @@
       </p:sp>
       <p:pic>
         <p:nvPicPr>
-          <p:cNvPr id="5" name="Image 0" descr="/mnt/data/confusion_matrix_random_forest.png">    </p:cNvPr>
+          <p:cNvPr id="5" name="Image 0" descr="/mnt/data/confusion_matrix_random_forest.png"/>
           <p:cNvPicPr>
             <a:picLocks noChangeAspect="1"/>
           </p:cNvPicPr>
           <p:nvPr/>
         </p:nvPicPr>
         <p:blipFill>
-          <a:blip r:embed="rId1"/>
+          <a:blip r:embed="rId3"/>
           <a:stretch>
             <a:fillRect/>
           </a:stretch>
@@ -9016,7 +8727,7 @@
           <a:bodyPr wrap="square" lIns="0" tIns="0" rIns="0" bIns="0" rtlCol="0" anchor="ctr"/>
           <a:lstStyle/>
           <a:p>
-            <a:pPr algn="ctr" indent="0" marL="0">
+            <a:pPr marL="0" indent="0" algn="ctr">
               <a:buNone/>
             </a:pPr>
             <a:r>
@@ -9033,14 +8744,14 @@
       </p:sp>
       <p:pic>
         <p:nvPicPr>
-          <p:cNvPr id="7" name="Image 1" descr="/mnt/data/roc_curve_comparison.png">    </p:cNvPr>
+          <p:cNvPr id="7" name="Image 1" descr="/mnt/data/roc_curve_comparison.png"/>
           <p:cNvPicPr>
             <a:picLocks noChangeAspect="1"/>
           </p:cNvPicPr>
           <p:nvPr/>
         </p:nvPicPr>
         <p:blipFill>
-          <a:blip r:embed="rId2"/>
+          <a:blip r:embed="rId4"/>
           <a:stretch>
             <a:fillRect/>
           </a:stretch>
@@ -9076,7 +8787,7 @@
           <a:bodyPr wrap="square" lIns="0" tIns="0" rIns="0" bIns="0" rtlCol="0" anchor="ctr"/>
           <a:lstStyle/>
           <a:p>
-            <a:pPr algn="ctr" indent="0" marL="0">
+            <a:pPr marL="0" indent="0" algn="ctr">
               <a:buNone/>
             </a:pPr>
             <a:r>
@@ -9114,7 +8825,7 @@
           </a:bodyPr>
           <a:lstStyle/>
           <a:p>
-            <a:pPr algn="ctr" indent="0" marL="0">
+            <a:pPr marL="0" indent="0" algn="ctr">
               <a:buNone/>
             </a:pPr>
             <a:r>
@@ -9150,7 +8861,7 @@
           <a:bodyPr wrap="square" lIns="0" tIns="0" rIns="0" bIns="0" rtlCol="0" anchor="ctr"/>
           <a:lstStyle/>
           <a:p>
-            <a:pPr indent="0" marL="0">
+            <a:pPr marL="0" indent="0">
               <a:buNone/>
             </a:pPr>
             <a:r>
@@ -9186,7 +8897,7 @@
           <a:bodyPr wrap="square" lIns="0" tIns="0" rIns="0" bIns="0" rtlCol="0" anchor="ctr"/>
           <a:lstStyle/>
           <a:p>
-            <a:pPr algn="r" indent="0" marL="0">
+            <a:pPr marL="0" indent="0" algn="r">
               <a:buNone/>
             </a:pPr>
             <a:r>
@@ -9217,6 +8928,7 @@
         <a:solidFill>
           <a:srgbClr val="0B1324"/>
         </a:solidFill>
+        <a:effectLst/>
       </p:bgPr>
     </p:bg>
     <p:spTree>
@@ -9256,7 +8968,7 @@
           </a:bodyPr>
           <a:lstStyle/>
           <a:p>
-            <a:pPr indent="0" marL="0">
+            <a:pPr marL="0" indent="0">
               <a:buNone/>
             </a:pPr>
             <a:r>
@@ -9297,7 +9009,7 @@
           </a:bodyPr>
           <a:lstStyle/>
           <a:p>
-            <a:pPr indent="0" marL="0">
+            <a:pPr marL="0" indent="0">
               <a:buNone/>
             </a:pPr>
             <a:r>
@@ -9337,14 +9049,14 @@
       </p:sp>
       <p:pic>
         <p:nvPicPr>
-          <p:cNvPr id="5" name="Image 0" descr="/mnt/data/feature_importance_random_forest.png">    </p:cNvPr>
+          <p:cNvPr id="5" name="Image 0" descr="/mnt/data/feature_importance_random_forest.png"/>
           <p:cNvPicPr>
             <a:picLocks noChangeAspect="1"/>
           </p:cNvPicPr>
           <p:nvPr/>
         </p:nvPicPr>
         <p:blipFill>
-          <a:blip r:embed="rId1"/>
+          <a:blip r:embed="rId3"/>
           <a:stretch>
             <a:fillRect/>
           </a:stretch>
@@ -9380,7 +9092,7 @@
           <a:bodyPr wrap="square" lIns="0" tIns="0" rIns="0" bIns="0" rtlCol="0" anchor="ctr"/>
           <a:lstStyle/>
           <a:p>
-            <a:pPr algn="ctr" indent="0" marL="0">
+            <a:pPr marL="0" indent="0" algn="ctr">
               <a:buNone/>
             </a:pPr>
             <a:r>
@@ -9416,7 +9128,7 @@
           <a:bodyPr wrap="square" lIns="0" tIns="0" rIns="0" bIns="0" rtlCol="0" anchor="ctr"/>
           <a:lstStyle/>
           <a:p>
-            <a:pPr algn="ctr" indent="0" marL="0">
+            <a:pPr marL="0" indent="0" algn="ctr">
               <a:buNone/>
             </a:pPr>
             <a:r>
@@ -9454,7 +9166,7 @@
           </a:bodyPr>
           <a:lstStyle/>
           <a:p>
-            <a:pPr indent="0" marL="0">
+            <a:pPr marL="0" indent="0">
               <a:buNone/>
             </a:pPr>
             <a:r>
@@ -9465,9 +9177,6 @@
               </a:rPr>
               <a:t>● </a:t>
             </a:r>
-            <a:pPr indent="0" marL="0">
-              <a:buNone/>
-            </a:pPr>
             <a:r>
               <a:rPr lang="en-US" sz="1150" dirty="0">
                 <a:solidFill>
@@ -9503,7 +9212,7 @@
           </a:bodyPr>
           <a:lstStyle/>
           <a:p>
-            <a:pPr indent="0" marL="0">
+            <a:pPr marL="0" indent="0">
               <a:buNone/>
             </a:pPr>
             <a:r>
@@ -9514,9 +9223,6 @@
               </a:rPr>
               <a:t>● </a:t>
             </a:r>
-            <a:pPr indent="0" marL="0">
-              <a:buNone/>
-            </a:pPr>
             <a:r>
               <a:rPr lang="en-US" sz="1150" dirty="0">
                 <a:solidFill>
@@ -9552,7 +9258,7 @@
           </a:bodyPr>
           <a:lstStyle/>
           <a:p>
-            <a:pPr indent="0" marL="0">
+            <a:pPr marL="0" indent="0">
               <a:buNone/>
             </a:pPr>
             <a:r>
@@ -9563,9 +9269,6 @@
               </a:rPr>
               <a:t>● </a:t>
             </a:r>
-            <a:pPr indent="0" marL="0">
-              <a:buNone/>
-            </a:pPr>
             <a:r>
               <a:rPr lang="en-US" sz="1150" dirty="0">
                 <a:solidFill>
@@ -9601,7 +9304,7 @@
           </a:bodyPr>
           <a:lstStyle/>
           <a:p>
-            <a:pPr indent="0" marL="0">
+            <a:pPr marL="0" indent="0">
               <a:buNone/>
             </a:pPr>
             <a:r>
@@ -9612,9 +9315,6 @@
               </a:rPr>
               <a:t>● </a:t>
             </a:r>
-            <a:pPr indent="0" marL="0">
-              <a:buNone/>
-            </a:pPr>
             <a:r>
               <a:rPr lang="en-US" sz="1150" dirty="0">
                 <a:solidFill>
@@ -9650,7 +9350,7 @@
           </a:bodyPr>
           <a:lstStyle/>
           <a:p>
-            <a:pPr indent="0" marL="0">
+            <a:pPr marL="0" indent="0">
               <a:buNone/>
             </a:pPr>
             <a:r>
@@ -9661,9 +9361,6 @@
               </a:rPr>
               <a:t>● </a:t>
             </a:r>
-            <a:pPr indent="0" marL="0">
-              <a:buNone/>
-            </a:pPr>
             <a:r>
               <a:rPr lang="en-US" sz="1150" dirty="0">
                 <a:solidFill>
@@ -9699,7 +9396,7 @@
           </a:bodyPr>
           <a:lstStyle/>
           <a:p>
-            <a:pPr algn="ctr" indent="0" marL="0">
+            <a:pPr marL="0" indent="0" algn="ctr">
               <a:buNone/>
             </a:pPr>
             <a:r>
@@ -9735,7 +9432,7 @@
           <a:bodyPr wrap="square" lIns="0" tIns="0" rIns="0" bIns="0" rtlCol="0" anchor="ctr"/>
           <a:lstStyle/>
           <a:p>
-            <a:pPr indent="0" marL="0">
+            <a:pPr marL="0" indent="0">
               <a:buNone/>
             </a:pPr>
             <a:r>
@@ -9771,7 +9468,7 @@
           <a:bodyPr wrap="square" lIns="0" tIns="0" rIns="0" bIns="0" rtlCol="0" anchor="ctr"/>
           <a:lstStyle/>
           <a:p>
-            <a:pPr algn="r" indent="0" marL="0">
+            <a:pPr marL="0" indent="0" algn="r">
               <a:buNone/>
             </a:pPr>
             <a:r>
@@ -10087,4 +9784,299 @@
     </a:ext>
   </a:extLst>
 </a:theme>
+</file>
+
+<file path=ppt/theme/theme2.xml><?xml version="1.0" encoding="utf-8"?>
+<a:theme xmlns:a="http://schemas.openxmlformats.org/drawingml/2006/main" name="Тема Office">
+  <a:themeElements>
+    <a:clrScheme name="Стандартная">
+      <a:dk1>
+        <a:sysClr val="windowText" lastClr="000000"/>
+      </a:dk1>
+      <a:lt1>
+        <a:sysClr val="window" lastClr="FFFFFF"/>
+      </a:lt1>
+      <a:dk2>
+        <a:srgbClr val="44546A"/>
+      </a:dk2>
+      <a:lt2>
+        <a:srgbClr val="E7E6E6"/>
+      </a:lt2>
+      <a:accent1>
+        <a:srgbClr val="4472C4"/>
+      </a:accent1>
+      <a:accent2>
+        <a:srgbClr val="ED7D31"/>
+      </a:accent2>
+      <a:accent3>
+        <a:srgbClr val="A5A5A5"/>
+      </a:accent3>
+      <a:accent4>
+        <a:srgbClr val="FFC000"/>
+      </a:accent4>
+      <a:accent5>
+        <a:srgbClr val="5B9BD5"/>
+      </a:accent5>
+      <a:accent6>
+        <a:srgbClr val="70AD47"/>
+      </a:accent6>
+      <a:hlink>
+        <a:srgbClr val="0563C1"/>
+      </a:hlink>
+      <a:folHlink>
+        <a:srgbClr val="954F72"/>
+      </a:folHlink>
+    </a:clrScheme>
+    <a:fontScheme name="Стандартная">
+      <a:majorFont>
+        <a:latin typeface="Calibri Light" panose="020F0302020204030204"/>
+        <a:ea typeface=""/>
+        <a:cs typeface=""/>
+        <a:font script="Jpan" typeface="游ゴシック Light"/>
+        <a:font script="Hang" typeface="맑은 고딕"/>
+        <a:font script="Hans" typeface="等线 Light"/>
+        <a:font script="Hant" typeface="新細明體"/>
+        <a:font script="Arab" typeface="Times New Roman"/>
+        <a:font script="Hebr" typeface="Times New Roman"/>
+        <a:font script="Thai" typeface="Angsana New"/>
+        <a:font script="Ethi" typeface="Nyala"/>
+        <a:font script="Beng" typeface="Vrinda"/>
+        <a:font script="Gujr" typeface="Shruti"/>
+        <a:font script="Khmr" typeface="MoolBoran"/>
+        <a:font script="Knda" typeface="Tunga"/>
+        <a:font script="Guru" typeface="Raavi"/>
+        <a:font script="Cans" typeface="Euphemia"/>
+        <a:font script="Cher" typeface="Plantagenet Cherokee"/>
+        <a:font script="Yiii" typeface="Microsoft Yi Baiti"/>
+        <a:font script="Tibt" typeface="Microsoft Himalaya"/>
+        <a:font script="Thaa" typeface="MV Boli"/>
+        <a:font script="Deva" typeface="Mangal"/>
+        <a:font script="Telu" typeface="Gautami"/>
+        <a:font script="Taml" typeface="Latha"/>
+        <a:font script="Syrc" typeface="Estrangelo Edessa"/>
+        <a:font script="Orya" typeface="Kalinga"/>
+        <a:font script="Mlym" typeface="Kartika"/>
+        <a:font script="Laoo" typeface="DokChampa"/>
+        <a:font script="Sinh" typeface="Iskoola Pota"/>
+        <a:font script="Mong" typeface="Mongolian Baiti"/>
+        <a:font script="Viet" typeface="Times New Roman"/>
+        <a:font script="Uigh" typeface="Microsoft Uighur"/>
+        <a:font script="Geor" typeface="Sylfaen"/>
+        <a:font script="Armn" typeface="Arial"/>
+        <a:font script="Bugi" typeface="Leelawadee UI"/>
+        <a:font script="Bopo" typeface="Microsoft JhengHei"/>
+        <a:font script="Java" typeface="Javanese Text"/>
+        <a:font script="Lisu" typeface="Segoe UI"/>
+        <a:font script="Mymr" typeface="Myanmar Text"/>
+        <a:font script="Nkoo" typeface="Ebrima"/>
+        <a:font script="Olck" typeface="Nirmala UI"/>
+        <a:font script="Osma" typeface="Ebrima"/>
+        <a:font script="Phag" typeface="Phagspa"/>
+        <a:font script="Syrn" typeface="Estrangelo Edessa"/>
+        <a:font script="Syrj" typeface="Estrangelo Edessa"/>
+        <a:font script="Syre" typeface="Estrangelo Edessa"/>
+        <a:font script="Sora" typeface="Nirmala UI"/>
+        <a:font script="Tale" typeface="Microsoft Tai Le"/>
+        <a:font script="Talu" typeface="Microsoft New Tai Lue"/>
+        <a:font script="Tfng" typeface="Ebrima"/>
+      </a:majorFont>
+      <a:minorFont>
+        <a:latin typeface="Calibri" panose="020F0502020204030204"/>
+        <a:ea typeface=""/>
+        <a:cs typeface=""/>
+        <a:font script="Jpan" typeface="游ゴシック"/>
+        <a:font script="Hang" typeface="맑은 고딕"/>
+        <a:font script="Hans" typeface="等线"/>
+        <a:font script="Hant" typeface="新細明體"/>
+        <a:font script="Arab" typeface="Arial"/>
+        <a:font script="Hebr" typeface="Arial"/>
+        <a:font script="Thai" typeface="Cordia New"/>
+        <a:font script="Ethi" typeface="Nyala"/>
+        <a:font script="Beng" typeface="Vrinda"/>
+        <a:font script="Gujr" typeface="Shruti"/>
+        <a:font script="Khmr" typeface="DaunPenh"/>
+        <a:font script="Knda" typeface="Tunga"/>
+        <a:font script="Guru" typeface="Raavi"/>
+        <a:font script="Cans" typeface="Euphemia"/>
+        <a:font script="Cher" typeface="Plantagenet Cherokee"/>
+        <a:font script="Yiii" typeface="Microsoft Yi Baiti"/>
+        <a:font script="Tibt" typeface="Microsoft Himalaya"/>
+        <a:font script="Thaa" typeface="MV Boli"/>
+        <a:font script="Deva" typeface="Mangal"/>
+        <a:font script="Telu" typeface="Gautami"/>
+        <a:font script="Taml" typeface="Latha"/>
+        <a:font script="Syrc" typeface="Estrangelo Edessa"/>
+        <a:font script="Orya" typeface="Kalinga"/>
+        <a:font script="Mlym" typeface="Kartika"/>
+        <a:font script="Laoo" typeface="DokChampa"/>
+        <a:font script="Sinh" typeface="Iskoola Pota"/>
+        <a:font script="Mong" typeface="Mongolian Baiti"/>
+        <a:font script="Viet" typeface="Arial"/>
+        <a:font script="Uigh" typeface="Microsoft Uighur"/>
+        <a:font script="Geor" typeface="Sylfaen"/>
+        <a:font script="Armn" typeface="Arial"/>
+        <a:font script="Bugi" typeface="Leelawadee UI"/>
+        <a:font script="Bopo" typeface="Microsoft JhengHei"/>
+        <a:font script="Java" typeface="Javanese Text"/>
+        <a:font script="Lisu" typeface="Segoe UI"/>
+        <a:font script="Mymr" typeface="Myanmar Text"/>
+        <a:font script="Nkoo" typeface="Ebrima"/>
+        <a:font script="Olck" typeface="Nirmala UI"/>
+        <a:font script="Osma" typeface="Ebrima"/>
+        <a:font script="Phag" typeface="Phagspa"/>
+        <a:font script="Syrn" typeface="Estrangelo Edessa"/>
+        <a:font script="Syrj" typeface="Estrangelo Edessa"/>
+        <a:font script="Syre" typeface="Estrangelo Edessa"/>
+        <a:font script="Sora" typeface="Nirmala UI"/>
+        <a:font script="Tale" typeface="Microsoft Tai Le"/>
+        <a:font script="Talu" typeface="Microsoft New Tai Lue"/>
+        <a:font script="Tfng" typeface="Ebrima"/>
+      </a:minorFont>
+    </a:fontScheme>
+    <a:fmtScheme name="Стандартная">
+      <a:fillStyleLst>
+        <a:solidFill>
+          <a:schemeClr val="phClr"/>
+        </a:solidFill>
+        <a:gradFill rotWithShape="1">
+          <a:gsLst>
+            <a:gs pos="0">
+              <a:schemeClr val="phClr">
+                <a:lumMod val="110000"/>
+                <a:satMod val="105000"/>
+                <a:tint val="67000"/>
+              </a:schemeClr>
+            </a:gs>
+            <a:gs pos="50000">
+              <a:schemeClr val="phClr">
+                <a:lumMod val="105000"/>
+                <a:satMod val="103000"/>
+                <a:tint val="73000"/>
+              </a:schemeClr>
+            </a:gs>
+            <a:gs pos="100000">
+              <a:schemeClr val="phClr">
+                <a:lumMod val="105000"/>
+                <a:satMod val="109000"/>
+                <a:tint val="81000"/>
+              </a:schemeClr>
+            </a:gs>
+          </a:gsLst>
+          <a:lin ang="5400000" scaled="0"/>
+        </a:gradFill>
+        <a:gradFill rotWithShape="1">
+          <a:gsLst>
+            <a:gs pos="0">
+              <a:schemeClr val="phClr">
+                <a:satMod val="103000"/>
+                <a:lumMod val="102000"/>
+                <a:tint val="94000"/>
+              </a:schemeClr>
+            </a:gs>
+            <a:gs pos="50000">
+              <a:schemeClr val="phClr">
+                <a:satMod val="110000"/>
+                <a:lumMod val="100000"/>
+                <a:shade val="100000"/>
+              </a:schemeClr>
+            </a:gs>
+            <a:gs pos="100000">
+              <a:schemeClr val="phClr">
+                <a:lumMod val="99000"/>
+                <a:satMod val="120000"/>
+                <a:shade val="78000"/>
+              </a:schemeClr>
+            </a:gs>
+          </a:gsLst>
+          <a:lin ang="5400000" scaled="0"/>
+        </a:gradFill>
+      </a:fillStyleLst>
+      <a:lnStyleLst>
+        <a:ln w="6350" cap="flat" cmpd="sng" algn="ctr">
+          <a:solidFill>
+            <a:schemeClr val="phClr"/>
+          </a:solidFill>
+          <a:prstDash val="solid"/>
+          <a:miter lim="800000"/>
+        </a:ln>
+        <a:ln w="12700" cap="flat" cmpd="sng" algn="ctr">
+          <a:solidFill>
+            <a:schemeClr val="phClr"/>
+          </a:solidFill>
+          <a:prstDash val="solid"/>
+          <a:miter lim="800000"/>
+        </a:ln>
+        <a:ln w="19050" cap="flat" cmpd="sng" algn="ctr">
+          <a:solidFill>
+            <a:schemeClr val="phClr"/>
+          </a:solidFill>
+          <a:prstDash val="solid"/>
+          <a:miter lim="800000"/>
+        </a:ln>
+      </a:lnStyleLst>
+      <a:effectStyleLst>
+        <a:effectStyle>
+          <a:effectLst/>
+        </a:effectStyle>
+        <a:effectStyle>
+          <a:effectLst/>
+        </a:effectStyle>
+        <a:effectStyle>
+          <a:effectLst>
+            <a:outerShdw blurRad="57150" dist="19050" dir="5400000" algn="ctr" rotWithShape="0">
+              <a:srgbClr val="000000">
+                <a:alpha val="63000"/>
+              </a:srgbClr>
+            </a:outerShdw>
+          </a:effectLst>
+        </a:effectStyle>
+      </a:effectStyleLst>
+      <a:bgFillStyleLst>
+        <a:solidFill>
+          <a:schemeClr val="phClr"/>
+        </a:solidFill>
+        <a:solidFill>
+          <a:schemeClr val="phClr">
+            <a:tint val="95000"/>
+            <a:satMod val="170000"/>
+          </a:schemeClr>
+        </a:solidFill>
+        <a:gradFill rotWithShape="1">
+          <a:gsLst>
+            <a:gs pos="0">
+              <a:schemeClr val="phClr">
+                <a:tint val="93000"/>
+                <a:satMod val="150000"/>
+                <a:shade val="98000"/>
+                <a:lumMod val="102000"/>
+              </a:schemeClr>
+            </a:gs>
+            <a:gs pos="50000">
+              <a:schemeClr val="phClr">
+                <a:tint val="98000"/>
+                <a:satMod val="130000"/>
+                <a:shade val="90000"/>
+                <a:lumMod val="103000"/>
+              </a:schemeClr>
+            </a:gs>
+            <a:gs pos="100000">
+              <a:schemeClr val="phClr">
+                <a:shade val="63000"/>
+                <a:satMod val="120000"/>
+              </a:schemeClr>
+            </a:gs>
+          </a:gsLst>
+          <a:lin ang="5400000" scaled="0"/>
+        </a:gradFill>
+      </a:bgFillStyleLst>
+    </a:fmtScheme>
+  </a:themeElements>
+  <a:objectDefaults/>
+  <a:extraClrSchemeLst/>
+  <a:extLst>
+    <a:ext uri="{05A4C25C-085E-4340-85A3-A5531E510DB2}">
+      <thm15:themeFamily xmlns:thm15="http://schemas.microsoft.com/office/thememl/2012/main" name="Office Theme" id="{62F939B6-93AF-4DB8-9C6B-D6C7DFDC589F}" vid="{4A3C46E8-61CC-4603-A589-7422A47A8E4A}"/>
+    </a:ext>
+  </a:extLst>
+</a:theme>
 </file>